--- a/slides/Soutenance_20min.pptx
+++ b/slides/Soutenance_20min.pptx
@@ -4678,6 +4678,877 @@
         </p:nvSpPr>
         <p:spPr>
           <a:xfrm flipH="false" flipV="false" rot="0">
+            <a:off x="1209418" y="2580252"/>
+            <a:ext cx="6362959" cy="3825729"/>
+          </a:xfrm>
+          <a:custGeom>
+            <a:avLst/>
+            <a:gdLst/>
+            <a:ahLst/>
+            <a:cxnLst/>
+            <a:rect r="r" b="b" t="t" l="l"/>
+            <a:pathLst>
+              <a:path h="3825729" w="6362959">
+                <a:moveTo>
+                  <a:pt x="0" y="0"/>
+                </a:moveTo>
+                <a:lnTo>
+                  <a:pt x="6362958" y="0"/>
+                </a:lnTo>
+                <a:lnTo>
+                  <a:pt x="6362958" y="3825728"/>
+                </a:lnTo>
+                <a:lnTo>
+                  <a:pt x="0" y="3825728"/>
+                </a:lnTo>
+                <a:lnTo>
+                  <a:pt x="0" y="0"/>
+                </a:lnTo>
+                <a:close/>
+              </a:path>
+            </a:pathLst>
+          </a:custGeom>
+          <a:blipFill>
+            <a:blip r:embed="rId2"/>
+            <a:stretch>
+              <a:fillRect l="0" t="0" r="0" b="0"/>
+            </a:stretch>
+          </a:blipFill>
+        </p:spPr>
+      </p:sp>
+      <p:sp>
+        <p:nvSpPr>
+          <p:cNvPr name="Freeform 3" id="3"/>
+          <p:cNvSpPr/>
+          <p:nvPr/>
+        </p:nvSpPr>
+        <p:spPr>
+          <a:xfrm flipH="false" flipV="false" rot="0">
+            <a:off x="9025013" y="2490114"/>
+            <a:ext cx="7062764" cy="3915866"/>
+          </a:xfrm>
+          <a:custGeom>
+            <a:avLst/>
+            <a:gdLst/>
+            <a:ahLst/>
+            <a:cxnLst/>
+            <a:rect r="r" b="b" t="t" l="l"/>
+            <a:pathLst>
+              <a:path h="3915866" w="7062764">
+                <a:moveTo>
+                  <a:pt x="0" y="0"/>
+                </a:moveTo>
+                <a:lnTo>
+                  <a:pt x="7062764" y="0"/>
+                </a:lnTo>
+                <a:lnTo>
+                  <a:pt x="7062764" y="3915866"/>
+                </a:lnTo>
+                <a:lnTo>
+                  <a:pt x="0" y="3915866"/>
+                </a:lnTo>
+                <a:lnTo>
+                  <a:pt x="0" y="0"/>
+                </a:lnTo>
+                <a:close/>
+              </a:path>
+            </a:pathLst>
+          </a:custGeom>
+          <a:blipFill>
+            <a:blip r:embed="rId3"/>
+            <a:stretch>
+              <a:fillRect l="0" t="0" r="-350" b="0"/>
+            </a:stretch>
+          </a:blipFill>
+        </p:spPr>
+      </p:sp>
+      <p:grpSp>
+        <p:nvGrpSpPr>
+          <p:cNvPr name="Group 4" id="4"/>
+          <p:cNvGrpSpPr/>
+          <p:nvPr/>
+        </p:nvGrpSpPr>
+        <p:grpSpPr>
+          <a:xfrm rot="0">
+            <a:off x="6986947" y="2472398"/>
+            <a:ext cx="585429" cy="248130"/>
+            <a:chOff x="0" y="0"/>
+            <a:chExt cx="154187" cy="65351"/>
+          </a:xfrm>
+        </p:grpSpPr>
+        <p:sp>
+          <p:nvSpPr>
+            <p:cNvPr name="Freeform 5" id="5"/>
+            <p:cNvSpPr/>
+            <p:nvPr/>
+          </p:nvSpPr>
+          <p:spPr>
+            <a:xfrm flipH="false" flipV="false" rot="0">
+              <a:off x="0" y="0"/>
+              <a:ext cx="154187" cy="65351"/>
+            </a:xfrm>
+            <a:custGeom>
+              <a:avLst/>
+              <a:gdLst/>
+              <a:ahLst/>
+              <a:cxnLst/>
+              <a:rect r="r" b="b" t="t" l="l"/>
+              <a:pathLst>
+                <a:path h="65351" w="154187">
+                  <a:moveTo>
+                    <a:pt x="0" y="0"/>
+                  </a:moveTo>
+                  <a:lnTo>
+                    <a:pt x="154187" y="0"/>
+                  </a:lnTo>
+                  <a:lnTo>
+                    <a:pt x="154187" y="65351"/>
+                  </a:lnTo>
+                  <a:lnTo>
+                    <a:pt x="0" y="65351"/>
+                  </a:lnTo>
+                  <a:close/>
+                </a:path>
+              </a:pathLst>
+            </a:custGeom>
+            <a:solidFill>
+              <a:srgbClr val="FFFFFF"/>
+            </a:solidFill>
+          </p:spPr>
+        </p:sp>
+        <p:sp>
+          <p:nvSpPr>
+            <p:cNvPr name="TextBox 6" id="6"/>
+            <p:cNvSpPr txBox="true"/>
+            <p:nvPr/>
+          </p:nvSpPr>
+          <p:spPr>
+            <a:xfrm>
+              <a:off x="0" y="28575"/>
+              <a:ext cx="154187" cy="36776"/>
+            </a:xfrm>
+            <a:prstGeom prst="rect">
+              <a:avLst/>
+            </a:prstGeom>
+          </p:spPr>
+          <p:txBody>
+            <a:bodyPr anchor="ctr" rtlCol="false" tIns="50800" lIns="50800" bIns="50800" rIns="50800"/>
+            <a:lstStyle/>
+            <a:p>
+              <a:pPr algn="ctr">
+                <a:lnSpc>
+                  <a:spcPts val="1305"/>
+                </a:lnSpc>
+              </a:pPr>
+            </a:p>
+          </p:txBody>
+        </p:sp>
+      </p:grpSp>
+      <p:grpSp>
+        <p:nvGrpSpPr>
+          <p:cNvPr name="Group 7" id="7"/>
+          <p:cNvGrpSpPr/>
+          <p:nvPr/>
+        </p:nvGrpSpPr>
+        <p:grpSpPr>
+          <a:xfrm rot="0">
+            <a:off x="1028700" y="9081243"/>
+            <a:ext cx="3099781" cy="361435"/>
+            <a:chOff x="0" y="0"/>
+            <a:chExt cx="4133041" cy="481914"/>
+          </a:xfrm>
+        </p:grpSpPr>
+        <p:sp>
+          <p:nvSpPr>
+            <p:cNvPr name="Freeform 8" id="8"/>
+            <p:cNvSpPr/>
+            <p:nvPr/>
+          </p:nvSpPr>
+          <p:spPr>
+            <a:xfrm flipH="false" flipV="false" rot="0">
+              <a:off x="0" y="0"/>
+              <a:ext cx="481914" cy="481914"/>
+            </a:xfrm>
+            <a:custGeom>
+              <a:avLst/>
+              <a:gdLst/>
+              <a:ahLst/>
+              <a:cxnLst/>
+              <a:rect r="r" b="b" t="t" l="l"/>
+              <a:pathLst>
+                <a:path h="481914" w="481914">
+                  <a:moveTo>
+                    <a:pt x="0" y="0"/>
+                  </a:moveTo>
+                  <a:lnTo>
+                    <a:pt x="481914" y="0"/>
+                  </a:lnTo>
+                  <a:lnTo>
+                    <a:pt x="481914" y="481914"/>
+                  </a:lnTo>
+                  <a:lnTo>
+                    <a:pt x="0" y="481914"/>
+                  </a:lnTo>
+                  <a:lnTo>
+                    <a:pt x="0" y="0"/>
+                  </a:lnTo>
+                  <a:close/>
+                </a:path>
+              </a:pathLst>
+            </a:custGeom>
+            <a:blipFill>
+              <a:blip r:embed="rId4">
+                <a:extLst>
+                  <a:ext uri="{96DAC541-7B7A-43D3-8B79-37D633B846F1}">
+                    <asvg:svgBlip xmlns:asvg="http://schemas.microsoft.com/office/drawing/2016/SVG/main" r:embed="rId5"/>
+                  </a:ext>
+                </a:extLst>
+              </a:blip>
+              <a:stretch>
+                <a:fillRect l="0" t="0" r="0" b="0"/>
+              </a:stretch>
+            </a:blipFill>
+          </p:spPr>
+        </p:sp>
+        <p:sp>
+          <p:nvSpPr>
+            <p:cNvPr name="TextBox 9" id="9"/>
+            <p:cNvSpPr txBox="true"/>
+            <p:nvPr/>
+          </p:nvSpPr>
+          <p:spPr>
+            <a:xfrm rot="0">
+              <a:off x="762184" y="114790"/>
+              <a:ext cx="3370857" cy="271146"/>
+            </a:xfrm>
+            <a:prstGeom prst="rect">
+              <a:avLst/>
+            </a:prstGeom>
+          </p:spPr>
+          <p:txBody>
+            <a:bodyPr anchor="t" rtlCol="false" tIns="0" lIns="0" bIns="0" rIns="0">
+              <a:spAutoFit/>
+            </a:bodyPr>
+            <a:lstStyle/>
+            <a:p>
+              <a:pPr algn="l">
+                <a:lnSpc>
+                  <a:spcPts val="1305"/>
+                </a:lnSpc>
+              </a:pPr>
+              <a:r>
+                <a:rPr lang="en-US" sz="1500" spc="-73">
+                  <a:solidFill>
+                    <a:srgbClr val="000000"/>
+                  </a:solidFill>
+                  <a:latin typeface="Arial"/>
+                  <a:ea typeface="Arial"/>
+                  <a:cs typeface="Arial"/>
+                  <a:sym typeface="Arial"/>
+                </a:rPr>
+                <a:t>@thelook europe e-commerce</a:t>
+              </a:r>
+            </a:p>
+          </p:txBody>
+        </p:sp>
+      </p:grpSp>
+      <p:grpSp>
+        <p:nvGrpSpPr>
+          <p:cNvPr name="Group 10" id="10"/>
+          <p:cNvGrpSpPr/>
+          <p:nvPr/>
+        </p:nvGrpSpPr>
+        <p:grpSpPr>
+          <a:xfrm rot="0">
+            <a:off x="1028700" y="1028700"/>
+            <a:ext cx="4484785" cy="361435"/>
+            <a:chOff x="0" y="0"/>
+            <a:chExt cx="5979713" cy="481914"/>
+          </a:xfrm>
+        </p:grpSpPr>
+        <p:sp>
+          <p:nvSpPr>
+            <p:cNvPr name="Freeform 11" id="11"/>
+            <p:cNvSpPr/>
+            <p:nvPr/>
+          </p:nvSpPr>
+          <p:spPr>
+            <a:xfrm flipH="false" flipV="false" rot="0">
+              <a:off x="0" y="0"/>
+              <a:ext cx="481914" cy="481914"/>
+            </a:xfrm>
+            <a:custGeom>
+              <a:avLst/>
+              <a:gdLst/>
+              <a:ahLst/>
+              <a:cxnLst/>
+              <a:rect r="r" b="b" t="t" l="l"/>
+              <a:pathLst>
+                <a:path h="481914" w="481914">
+                  <a:moveTo>
+                    <a:pt x="0" y="0"/>
+                  </a:moveTo>
+                  <a:lnTo>
+                    <a:pt x="481914" y="0"/>
+                  </a:lnTo>
+                  <a:lnTo>
+                    <a:pt x="481914" y="481914"/>
+                  </a:lnTo>
+                  <a:lnTo>
+                    <a:pt x="0" y="481914"/>
+                  </a:lnTo>
+                  <a:lnTo>
+                    <a:pt x="0" y="0"/>
+                  </a:lnTo>
+                  <a:close/>
+                </a:path>
+              </a:pathLst>
+            </a:custGeom>
+            <a:blipFill>
+              <a:blip r:embed="rId4">
+                <a:extLst>
+                  <a:ext uri="{96DAC541-7B7A-43D3-8B79-37D633B846F1}">
+                    <asvg:svgBlip xmlns:asvg="http://schemas.microsoft.com/office/drawing/2016/SVG/main" r:embed="rId5"/>
+                  </a:ext>
+                </a:extLst>
+              </a:blip>
+              <a:stretch>
+                <a:fillRect l="0" t="0" r="0" b="0"/>
+              </a:stretch>
+            </a:blipFill>
+          </p:spPr>
+        </p:sp>
+        <p:sp>
+          <p:nvSpPr>
+            <p:cNvPr name="TextBox 12" id="12"/>
+            <p:cNvSpPr txBox="true"/>
+            <p:nvPr/>
+          </p:nvSpPr>
+          <p:spPr>
+            <a:xfrm rot="0">
+              <a:off x="762184" y="4738"/>
+              <a:ext cx="5217529" cy="415287"/>
+            </a:xfrm>
+            <a:prstGeom prst="rect">
+              <a:avLst/>
+            </a:prstGeom>
+          </p:spPr>
+          <p:txBody>
+            <a:bodyPr anchor="t" rtlCol="false" tIns="0" lIns="0" bIns="0" rIns="0">
+              <a:spAutoFit/>
+            </a:bodyPr>
+            <a:lstStyle/>
+            <a:p>
+              <a:pPr algn="ctr">
+                <a:lnSpc>
+                  <a:spcPts val="2520"/>
+                </a:lnSpc>
+                <a:spcBef>
+                  <a:spcPct val="0"/>
+                </a:spcBef>
+              </a:pPr>
+              <a:r>
+                <a:rPr lang="en-US" b="true" sz="1800" spc="-88">
+                  <a:solidFill>
+                    <a:srgbClr val="000000"/>
+                  </a:solidFill>
+                  <a:latin typeface="Arial Bold"/>
+                  <a:ea typeface="Arial Bold"/>
+                  <a:cs typeface="Arial Bold"/>
+                  <a:sym typeface="Arial Bold"/>
+                </a:rPr>
+                <a:t>TheLook - Women France 2023 vs 2024 </a:t>
+              </a:r>
+            </a:p>
+          </p:txBody>
+        </p:sp>
+      </p:grpSp>
+      <p:sp>
+        <p:nvSpPr>
+          <p:cNvPr name="TextBox 13" id="13"/>
+          <p:cNvSpPr txBox="true"/>
+          <p:nvPr/>
+        </p:nvSpPr>
+        <p:spPr>
+          <a:xfrm rot="0">
+            <a:off x="1209418" y="1840794"/>
+            <a:ext cx="5311098" cy="355473"/>
+          </a:xfrm>
+          <a:prstGeom prst="rect">
+            <a:avLst/>
+          </a:prstGeom>
+        </p:spPr>
+        <p:txBody>
+          <a:bodyPr anchor="t" rtlCol="false" tIns="0" lIns="0" bIns="0" rIns="0">
+            <a:spAutoFit/>
+          </a:bodyPr>
+          <a:lstStyle/>
+          <a:p>
+            <a:pPr algn="l">
+              <a:lnSpc>
+                <a:spcPts val="2435"/>
+              </a:lnSpc>
+            </a:pPr>
+            <a:r>
+              <a:rPr lang="en-US" sz="2799" spc="-137" b="true">
+                <a:solidFill>
+                  <a:srgbClr val="000000"/>
+                </a:solidFill>
+                <a:latin typeface="Arial Bold"/>
+                <a:ea typeface="Arial Bold"/>
+                <a:cs typeface="Arial Bold"/>
+                <a:sym typeface="Arial Bold"/>
+              </a:rPr>
+              <a:t>Top marques &amp; Catégories par CA</a:t>
+            </a:r>
+          </a:p>
+        </p:txBody>
+      </p:sp>
+      <p:sp>
+        <p:nvSpPr>
+          <p:cNvPr name="TextBox 14" id="14"/>
+          <p:cNvSpPr txBox="true"/>
+          <p:nvPr/>
+        </p:nvSpPr>
+        <p:spPr>
+          <a:xfrm rot="0">
+            <a:off x="1600338" y="6673825"/>
+            <a:ext cx="6899773" cy="2047875"/>
+          </a:xfrm>
+          <a:prstGeom prst="rect">
+            <a:avLst/>
+          </a:prstGeom>
+        </p:spPr>
+        <p:txBody>
+          <a:bodyPr anchor="t" rtlCol="false" tIns="0" lIns="0" bIns="0" rIns="0">
+            <a:spAutoFit/>
+          </a:bodyPr>
+          <a:lstStyle/>
+          <a:p>
+            <a:pPr algn="just">
+              <a:lnSpc>
+                <a:spcPts val="2239"/>
+              </a:lnSpc>
+            </a:pPr>
+            <a:r>
+              <a:rPr lang="en-US" b="true" sz="1599" spc="-78" u="sng">
+                <a:solidFill>
+                  <a:srgbClr val="000000"/>
+                </a:solidFill>
+                <a:latin typeface="Arial Bold"/>
+                <a:ea typeface="Arial Bold"/>
+                <a:cs typeface="Arial Bold"/>
+                <a:sym typeface="Arial Bold"/>
+              </a:rPr>
+              <a:t>Principales constats :</a:t>
+            </a:r>
+          </a:p>
+          <a:p>
+            <a:pPr algn="just">
+              <a:lnSpc>
+                <a:spcPts val="2239"/>
+              </a:lnSpc>
+            </a:pPr>
+          </a:p>
+          <a:p>
+            <a:pPr algn="l" marL="302261" indent="-151130" lvl="1">
+              <a:lnSpc>
+                <a:spcPts val="1960"/>
+              </a:lnSpc>
+              <a:buFont typeface="Arial"/>
+              <a:buChar char="•"/>
+            </a:pPr>
+            <a:r>
+              <a:rPr lang="en-US" sz="1400" spc="-68">
+                <a:solidFill>
+                  <a:srgbClr val="000000"/>
+                </a:solidFill>
+                <a:latin typeface="Arial"/>
+                <a:ea typeface="Arial"/>
+                <a:cs typeface="Arial"/>
+                <a:sym typeface="Arial"/>
+              </a:rPr>
+              <a:t>Outerwear &amp; Coats : CA 3 148 € + marg</a:t>
+            </a:r>
+            <a:r>
+              <a:rPr lang="en-US" sz="1400" spc="-68">
+                <a:solidFill>
+                  <a:srgbClr val="000000"/>
+                </a:solidFill>
+                <a:latin typeface="Arial"/>
+                <a:ea typeface="Arial"/>
+                <a:cs typeface="Arial"/>
+                <a:sym typeface="Arial"/>
+              </a:rPr>
+              <a:t>e 55,2% = c</a:t>
+            </a:r>
+            <a:r>
+              <a:rPr lang="en-US" sz="1400" spc="-68">
+                <a:solidFill>
+                  <a:srgbClr val="000000"/>
+                </a:solidFill>
+                <a:latin typeface="Arial"/>
+                <a:ea typeface="Arial"/>
+                <a:cs typeface="Arial"/>
+                <a:sym typeface="Arial"/>
+              </a:rPr>
+              <a:t>atégorie champion</a:t>
+            </a:r>
+          </a:p>
+          <a:p>
+            <a:pPr algn="l" marL="302261" indent="-151130" lvl="1">
+              <a:lnSpc>
+                <a:spcPts val="1960"/>
+              </a:lnSpc>
+              <a:buFont typeface="Arial"/>
+              <a:buChar char="•"/>
+            </a:pPr>
+            <a:r>
+              <a:rPr lang="en-US" sz="1400" spc="-68">
+                <a:solidFill>
+                  <a:srgbClr val="000000"/>
+                </a:solidFill>
+                <a:latin typeface="Arial"/>
+                <a:ea typeface="Arial"/>
+                <a:cs typeface="Arial"/>
+                <a:sym typeface="Arial"/>
+              </a:rPr>
+              <a:t>Intimates : CA 2 259 € (2e) avec fort volume (72 lignes Complete)</a:t>
+            </a:r>
+          </a:p>
+          <a:p>
+            <a:pPr algn="l" marL="302261" indent="-151130" lvl="1">
+              <a:lnSpc>
+                <a:spcPts val="1960"/>
+              </a:lnSpc>
+              <a:buFont typeface="Arial"/>
+              <a:buChar char="•"/>
+            </a:pPr>
+            <a:r>
+              <a:rPr lang="en-US" sz="1400" spc="-68">
+                <a:solidFill>
+                  <a:srgbClr val="000000"/>
+                </a:solidFill>
+                <a:latin typeface="Arial"/>
+                <a:ea typeface="Arial"/>
+                <a:cs typeface="Arial"/>
+                <a:sym typeface="Arial"/>
+              </a:rPr>
+              <a:t>The North Face : 1 211 € de CA — marque dominante</a:t>
+            </a:r>
+          </a:p>
+          <a:p>
+            <a:pPr algn="l" marL="302261" indent="-151130" lvl="1">
+              <a:lnSpc>
+                <a:spcPts val="1960"/>
+              </a:lnSpc>
+              <a:buFont typeface="Arial"/>
+              <a:buChar char="•"/>
+            </a:pPr>
+            <a:r>
+              <a:rPr lang="en-US" sz="1400" spc="-68">
+                <a:solidFill>
+                  <a:srgbClr val="000000"/>
+                </a:solidFill>
+                <a:latin typeface="Arial"/>
+                <a:ea typeface="Arial"/>
+                <a:cs typeface="Arial"/>
+                <a:sym typeface="Arial"/>
+              </a:rPr>
+              <a:t>Arc'teryx + PAIGE = 35% du CA marques Top 10</a:t>
+            </a:r>
+          </a:p>
+          <a:p>
+            <a:pPr algn="l" marL="302261" indent="-151130" lvl="1">
+              <a:lnSpc>
+                <a:spcPts val="1960"/>
+              </a:lnSpc>
+              <a:buFont typeface="Arial"/>
+              <a:buChar char="•"/>
+            </a:pPr>
+            <a:r>
+              <a:rPr lang="en-US" sz="1400" spc="-68">
+                <a:solidFill>
+                  <a:srgbClr val="000000"/>
+                </a:solidFill>
+                <a:latin typeface="Arial"/>
+                <a:ea typeface="Arial"/>
+                <a:cs typeface="Arial"/>
+                <a:sym typeface="Arial"/>
+              </a:rPr>
+              <a:t>Blazers &amp; Jackets : taux de marge 61,8% mais faible CA — potentiel sous-exploité</a:t>
+            </a:r>
+          </a:p>
+          <a:p>
+            <a:pPr algn="l" marL="302261" indent="-151130" lvl="1">
+              <a:lnSpc>
+                <a:spcPts val="1960"/>
+              </a:lnSpc>
+              <a:spcBef>
+                <a:spcPct val="0"/>
+              </a:spcBef>
+              <a:buFont typeface="Arial"/>
+              <a:buChar char="•"/>
+            </a:pPr>
+            <a:r>
+              <a:rPr lang="en-US" sz="1400" spc="-68">
+                <a:solidFill>
+                  <a:srgbClr val="000000"/>
+                </a:solidFill>
+                <a:latin typeface="Arial"/>
+                <a:ea typeface="Arial"/>
+                <a:cs typeface="Arial"/>
+                <a:sym typeface="Arial"/>
+              </a:rPr>
+              <a:t>Swim : meilleur taux de marge (59,1%) — à développer campagne été</a:t>
+            </a:r>
+          </a:p>
+        </p:txBody>
+      </p:sp>
+      <p:sp>
+        <p:nvSpPr>
+          <p:cNvPr name="TextBox 15" id="15"/>
+          <p:cNvSpPr txBox="true"/>
+          <p:nvPr/>
+        </p:nvSpPr>
+        <p:spPr>
+          <a:xfrm rot="0">
+            <a:off x="9291195" y="6686710"/>
+            <a:ext cx="6682139" cy="2352675"/>
+          </a:xfrm>
+          <a:prstGeom prst="rect">
+            <a:avLst/>
+          </a:prstGeom>
+        </p:spPr>
+        <p:txBody>
+          <a:bodyPr anchor="t" rtlCol="false" tIns="0" lIns="0" bIns="0" rIns="0">
+            <a:spAutoFit/>
+          </a:bodyPr>
+          <a:lstStyle/>
+          <a:p>
+            <a:pPr algn="just">
+              <a:lnSpc>
+                <a:spcPts val="2239"/>
+              </a:lnSpc>
+            </a:pPr>
+            <a:r>
+              <a:rPr lang="en-US" b="true" sz="1599" spc="-78" u="sng">
+                <a:solidFill>
+                  <a:srgbClr val="000000"/>
+                </a:solidFill>
+                <a:latin typeface="Arial Bold"/>
+                <a:ea typeface="Arial Bold"/>
+                <a:cs typeface="Arial Bold"/>
+                <a:sym typeface="Arial Bold"/>
+              </a:rPr>
+              <a:t>Insight clé :</a:t>
+            </a:r>
+          </a:p>
+          <a:p>
+            <a:pPr algn="just">
+              <a:lnSpc>
+                <a:spcPts val="2239"/>
+              </a:lnSpc>
+            </a:pPr>
+          </a:p>
+          <a:p>
+            <a:pPr algn="l" marL="302261" indent="-151130" lvl="1">
+              <a:lnSpc>
+                <a:spcPts val="1960"/>
+              </a:lnSpc>
+              <a:buFont typeface="Arial"/>
+              <a:buChar char="•"/>
+            </a:pPr>
+            <a:r>
+              <a:rPr lang="en-US" sz="1400" spc="-68">
+                <a:solidFill>
+                  <a:srgbClr val="000000"/>
+                </a:solidFill>
+                <a:latin typeface="Arial"/>
+                <a:ea typeface="Arial"/>
+                <a:cs typeface="Arial"/>
+                <a:sym typeface="Arial"/>
+              </a:rPr>
+              <a:t>Outerwear &amp; Coats cumule fort CA ET forte marge : priorité absolue pour les investissements marketing.</a:t>
+            </a:r>
+          </a:p>
+          <a:p>
+            <a:pPr algn="l">
+              <a:lnSpc>
+                <a:spcPts val="1960"/>
+              </a:lnSpc>
+            </a:pPr>
+          </a:p>
+          <a:p>
+            <a:pPr algn="just">
+              <a:lnSpc>
+                <a:spcPts val="2239"/>
+              </a:lnSpc>
+            </a:pPr>
+            <a:r>
+              <a:rPr lang="en-US" b="true" sz="1599" spc="-78" u="sng">
+                <a:solidFill>
+                  <a:srgbClr val="000000"/>
+                </a:solidFill>
+                <a:latin typeface="Arial Bold"/>
+                <a:ea typeface="Arial Bold"/>
+                <a:cs typeface="Arial Bold"/>
+                <a:sym typeface="Arial Bold"/>
+              </a:rPr>
+              <a:t>Recommandations :</a:t>
+            </a:r>
+          </a:p>
+          <a:p>
+            <a:pPr algn="just">
+              <a:lnSpc>
+                <a:spcPts val="2239"/>
+              </a:lnSpc>
+            </a:pPr>
+          </a:p>
+          <a:p>
+            <a:pPr algn="l" marL="302261" indent="-151130" lvl="1">
+              <a:lnSpc>
+                <a:spcPts val="1960"/>
+              </a:lnSpc>
+              <a:buFont typeface="Arial"/>
+              <a:buChar char="•"/>
+            </a:pPr>
+            <a:r>
+              <a:rPr lang="en-US" sz="1400" spc="-68">
+                <a:solidFill>
+                  <a:srgbClr val="000000"/>
+                </a:solidFill>
+                <a:latin typeface="Arial"/>
+                <a:ea typeface="Arial"/>
+                <a:cs typeface="Arial"/>
+                <a:sym typeface="Arial"/>
+              </a:rPr>
+              <a:t>Concentrer le budget acquisition sur Outerwear, Swim et Accessories. </a:t>
+            </a:r>
+          </a:p>
+          <a:p>
+            <a:pPr algn="l" marL="302261" indent="-151130" lvl="1">
+              <a:lnSpc>
+                <a:spcPts val="1960"/>
+              </a:lnSpc>
+              <a:spcBef>
+                <a:spcPct val="0"/>
+              </a:spcBef>
+              <a:buFont typeface="Arial"/>
+              <a:buChar char="•"/>
+            </a:pPr>
+            <a:r>
+              <a:rPr lang="en-US" sz="1400" spc="-68">
+                <a:solidFill>
+                  <a:srgbClr val="000000"/>
+                </a:solidFill>
+                <a:latin typeface="Arial"/>
+                <a:ea typeface="Arial"/>
+                <a:cs typeface="Arial"/>
+                <a:sym typeface="Arial"/>
+              </a:rPr>
+              <a:t>Développer Blazers &amp; Jackets (forte marge, faible CA = visibilité insuffisante)</a:t>
+            </a:r>
+            <a:r>
+              <a:rPr lang="en-US" b="true" sz="1400" spc="-68" u="sng">
+                <a:solidFill>
+                  <a:srgbClr val="000000"/>
+                </a:solidFill>
+                <a:latin typeface="Arial Bold"/>
+                <a:ea typeface="Arial Bold"/>
+                <a:cs typeface="Arial Bold"/>
+                <a:sym typeface="Arial Bold"/>
+              </a:rPr>
+              <a:t>.</a:t>
+            </a:r>
+          </a:p>
+        </p:txBody>
+      </p:sp>
+      <p:sp>
+        <p:nvSpPr>
+          <p:cNvPr name="Freeform 16" id="16"/>
+          <p:cNvSpPr/>
+          <p:nvPr/>
+        </p:nvSpPr>
+        <p:spPr>
+          <a:xfrm flipH="false" flipV="false" rot="0">
+            <a:off x="17115420" y="9016755"/>
+            <a:ext cx="287760" cy="402265"/>
+          </a:xfrm>
+          <a:custGeom>
+            <a:avLst/>
+            <a:gdLst/>
+            <a:ahLst/>
+            <a:cxnLst/>
+            <a:rect r="r" b="b" t="t" l="l"/>
+            <a:pathLst>
+              <a:path h="402265" w="287760">
+                <a:moveTo>
+                  <a:pt x="0" y="0"/>
+                </a:moveTo>
+                <a:lnTo>
+                  <a:pt x="287760" y="0"/>
+                </a:lnTo>
+                <a:lnTo>
+                  <a:pt x="287760" y="402265"/>
+                </a:lnTo>
+                <a:lnTo>
+                  <a:pt x="0" y="402265"/>
+                </a:lnTo>
+                <a:lnTo>
+                  <a:pt x="0" y="0"/>
+                </a:lnTo>
+                <a:close/>
+              </a:path>
+            </a:pathLst>
+          </a:custGeom>
+          <a:blipFill>
+            <a:blip r:embed="rId6">
+              <a:extLst>
+                <a:ext uri="{96DAC541-7B7A-43D3-8B79-37D633B846F1}">
+                  <asvg:svgBlip xmlns:asvg="http://schemas.microsoft.com/office/drawing/2016/SVG/main" r:embed="rId7"/>
+                </a:ext>
+              </a:extLst>
+            </a:blip>
+            <a:stretch>
+              <a:fillRect l="0" t="0" r="0" b="0"/>
+            </a:stretch>
+          </a:blipFill>
+        </p:spPr>
+      </p:sp>
+    </p:spTree>
+  </p:cSld>
+  <p:clrMapOvr>
+    <a:masterClrMapping/>
+  </p:clrMapOvr>
+</p:sld>
+</file>
+
+<file path=ppt/slides/slide13.xml><?xml version="1.0" encoding="utf-8"?>
+<p:sld xmlns:p="http://schemas.openxmlformats.org/presentationml/2006/main" xmlns:a="http://schemas.openxmlformats.org/drawingml/2006/main" xmlns:r="http://schemas.openxmlformats.org/officeDocument/2006/relationships">
+  <p:cSld>
+    <p:spTree>
+      <p:nvGrpSpPr>
+        <p:cNvPr id="1" name=""/>
+        <p:cNvGrpSpPr/>
+        <p:nvPr/>
+      </p:nvGrpSpPr>
+      <p:grpSpPr>
+        <a:xfrm>
+          <a:off x="0" y="0"/>
+          <a:ext cx="0" cy="0"/>
+          <a:chOff x="0" y="0"/>
+          <a:chExt cx="0" cy="0"/>
+        </a:xfrm>
+      </p:grpSpPr>
+      <p:sp>
+        <p:nvSpPr>
+          <p:cNvPr name="Freeform 2" id="2"/>
+          <p:cNvSpPr/>
+          <p:nvPr/>
+        </p:nvSpPr>
+        <p:spPr>
+          <a:xfrm flipH="false" flipV="false" rot="0">
             <a:off x="8979640" y="1732524"/>
             <a:ext cx="5941264" cy="3628217"/>
           </a:xfrm>
@@ -5450,877 +6321,6 @@
         </p:nvSpPr>
         <p:spPr>
           <a:xfrm flipH="false" flipV="false" rot="0">
-            <a:off x="17115420" y="9016755"/>
-            <a:ext cx="287760" cy="402265"/>
-          </a:xfrm>
-          <a:custGeom>
-            <a:avLst/>
-            <a:gdLst/>
-            <a:ahLst/>
-            <a:cxnLst/>
-            <a:rect r="r" b="b" t="t" l="l"/>
-            <a:pathLst>
-              <a:path h="402265" w="287760">
-                <a:moveTo>
-                  <a:pt x="0" y="0"/>
-                </a:moveTo>
-                <a:lnTo>
-                  <a:pt x="287760" y="0"/>
-                </a:lnTo>
-                <a:lnTo>
-                  <a:pt x="287760" y="402265"/>
-                </a:lnTo>
-                <a:lnTo>
-                  <a:pt x="0" y="402265"/>
-                </a:lnTo>
-                <a:lnTo>
-                  <a:pt x="0" y="0"/>
-                </a:lnTo>
-                <a:close/>
-              </a:path>
-            </a:pathLst>
-          </a:custGeom>
-          <a:blipFill>
-            <a:blip r:embed="rId8">
-              <a:extLst>
-                <a:ext uri="{96DAC541-7B7A-43D3-8B79-37D633B846F1}">
-                  <asvg:svgBlip xmlns:asvg="http://schemas.microsoft.com/office/drawing/2016/SVG/main" r:embed="rId9"/>
-                </a:ext>
-              </a:extLst>
-            </a:blip>
-            <a:stretch>
-              <a:fillRect l="0" t="0" r="0" b="0"/>
-            </a:stretch>
-          </a:blipFill>
-        </p:spPr>
-      </p:sp>
-    </p:spTree>
-  </p:cSld>
-  <p:clrMapOvr>
-    <a:masterClrMapping/>
-  </p:clrMapOvr>
-</p:sld>
-</file>
-
-<file path=ppt/slides/slide13.xml><?xml version="1.0" encoding="utf-8"?>
-<p:sld xmlns:p="http://schemas.openxmlformats.org/presentationml/2006/main" xmlns:a="http://schemas.openxmlformats.org/drawingml/2006/main" xmlns:r="http://schemas.openxmlformats.org/officeDocument/2006/relationships">
-  <p:cSld>
-    <p:spTree>
-      <p:nvGrpSpPr>
-        <p:cNvPr id="1" name=""/>
-        <p:cNvGrpSpPr/>
-        <p:nvPr/>
-      </p:nvGrpSpPr>
-      <p:grpSpPr>
-        <a:xfrm>
-          <a:off x="0" y="0"/>
-          <a:ext cx="0" cy="0"/>
-          <a:chOff x="0" y="0"/>
-          <a:chExt cx="0" cy="0"/>
-        </a:xfrm>
-      </p:grpSpPr>
-      <p:sp>
-        <p:nvSpPr>
-          <p:cNvPr name="Freeform 2" id="2"/>
-          <p:cNvSpPr/>
-          <p:nvPr/>
-        </p:nvSpPr>
-        <p:spPr>
-          <a:xfrm flipH="false" flipV="false" rot="0">
-            <a:off x="1209418" y="2580252"/>
-            <a:ext cx="6362959" cy="3825729"/>
-          </a:xfrm>
-          <a:custGeom>
-            <a:avLst/>
-            <a:gdLst/>
-            <a:ahLst/>
-            <a:cxnLst/>
-            <a:rect r="r" b="b" t="t" l="l"/>
-            <a:pathLst>
-              <a:path h="3825729" w="6362959">
-                <a:moveTo>
-                  <a:pt x="0" y="0"/>
-                </a:moveTo>
-                <a:lnTo>
-                  <a:pt x="6362958" y="0"/>
-                </a:lnTo>
-                <a:lnTo>
-                  <a:pt x="6362958" y="3825728"/>
-                </a:lnTo>
-                <a:lnTo>
-                  <a:pt x="0" y="3825728"/>
-                </a:lnTo>
-                <a:lnTo>
-                  <a:pt x="0" y="0"/>
-                </a:lnTo>
-                <a:close/>
-              </a:path>
-            </a:pathLst>
-          </a:custGeom>
-          <a:blipFill>
-            <a:blip r:embed="rId2"/>
-            <a:stretch>
-              <a:fillRect l="0" t="0" r="0" b="0"/>
-            </a:stretch>
-          </a:blipFill>
-        </p:spPr>
-      </p:sp>
-      <p:sp>
-        <p:nvSpPr>
-          <p:cNvPr name="Freeform 3" id="3"/>
-          <p:cNvSpPr/>
-          <p:nvPr/>
-        </p:nvSpPr>
-        <p:spPr>
-          <a:xfrm flipH="false" flipV="false" rot="0">
-            <a:off x="9025013" y="2490114"/>
-            <a:ext cx="7062764" cy="3915866"/>
-          </a:xfrm>
-          <a:custGeom>
-            <a:avLst/>
-            <a:gdLst/>
-            <a:ahLst/>
-            <a:cxnLst/>
-            <a:rect r="r" b="b" t="t" l="l"/>
-            <a:pathLst>
-              <a:path h="3915866" w="7062764">
-                <a:moveTo>
-                  <a:pt x="0" y="0"/>
-                </a:moveTo>
-                <a:lnTo>
-                  <a:pt x="7062764" y="0"/>
-                </a:lnTo>
-                <a:lnTo>
-                  <a:pt x="7062764" y="3915866"/>
-                </a:lnTo>
-                <a:lnTo>
-                  <a:pt x="0" y="3915866"/>
-                </a:lnTo>
-                <a:lnTo>
-                  <a:pt x="0" y="0"/>
-                </a:lnTo>
-                <a:close/>
-              </a:path>
-            </a:pathLst>
-          </a:custGeom>
-          <a:blipFill>
-            <a:blip r:embed="rId3"/>
-            <a:stretch>
-              <a:fillRect l="0" t="0" r="-350" b="0"/>
-            </a:stretch>
-          </a:blipFill>
-        </p:spPr>
-      </p:sp>
-      <p:grpSp>
-        <p:nvGrpSpPr>
-          <p:cNvPr name="Group 4" id="4"/>
-          <p:cNvGrpSpPr/>
-          <p:nvPr/>
-        </p:nvGrpSpPr>
-        <p:grpSpPr>
-          <a:xfrm rot="0">
-            <a:off x="6986947" y="2472398"/>
-            <a:ext cx="585429" cy="248130"/>
-            <a:chOff x="0" y="0"/>
-            <a:chExt cx="154187" cy="65351"/>
-          </a:xfrm>
-        </p:grpSpPr>
-        <p:sp>
-          <p:nvSpPr>
-            <p:cNvPr name="Freeform 5" id="5"/>
-            <p:cNvSpPr/>
-            <p:nvPr/>
-          </p:nvSpPr>
-          <p:spPr>
-            <a:xfrm flipH="false" flipV="false" rot="0">
-              <a:off x="0" y="0"/>
-              <a:ext cx="154187" cy="65351"/>
-            </a:xfrm>
-            <a:custGeom>
-              <a:avLst/>
-              <a:gdLst/>
-              <a:ahLst/>
-              <a:cxnLst/>
-              <a:rect r="r" b="b" t="t" l="l"/>
-              <a:pathLst>
-                <a:path h="65351" w="154187">
-                  <a:moveTo>
-                    <a:pt x="0" y="0"/>
-                  </a:moveTo>
-                  <a:lnTo>
-                    <a:pt x="154187" y="0"/>
-                  </a:lnTo>
-                  <a:lnTo>
-                    <a:pt x="154187" y="65351"/>
-                  </a:lnTo>
-                  <a:lnTo>
-                    <a:pt x="0" y="65351"/>
-                  </a:lnTo>
-                  <a:close/>
-                </a:path>
-              </a:pathLst>
-            </a:custGeom>
-            <a:solidFill>
-              <a:srgbClr val="FFFFFF"/>
-            </a:solidFill>
-          </p:spPr>
-        </p:sp>
-        <p:sp>
-          <p:nvSpPr>
-            <p:cNvPr name="TextBox 6" id="6"/>
-            <p:cNvSpPr txBox="true"/>
-            <p:nvPr/>
-          </p:nvSpPr>
-          <p:spPr>
-            <a:xfrm>
-              <a:off x="0" y="28575"/>
-              <a:ext cx="154187" cy="36776"/>
-            </a:xfrm>
-            <a:prstGeom prst="rect">
-              <a:avLst/>
-            </a:prstGeom>
-          </p:spPr>
-          <p:txBody>
-            <a:bodyPr anchor="ctr" rtlCol="false" tIns="50800" lIns="50800" bIns="50800" rIns="50800"/>
-            <a:lstStyle/>
-            <a:p>
-              <a:pPr algn="ctr">
-                <a:lnSpc>
-                  <a:spcPts val="1305"/>
-                </a:lnSpc>
-              </a:pPr>
-            </a:p>
-          </p:txBody>
-        </p:sp>
-      </p:grpSp>
-      <p:grpSp>
-        <p:nvGrpSpPr>
-          <p:cNvPr name="Group 7" id="7"/>
-          <p:cNvGrpSpPr/>
-          <p:nvPr/>
-        </p:nvGrpSpPr>
-        <p:grpSpPr>
-          <a:xfrm rot="0">
-            <a:off x="1028700" y="9081243"/>
-            <a:ext cx="3099781" cy="361435"/>
-            <a:chOff x="0" y="0"/>
-            <a:chExt cx="4133041" cy="481914"/>
-          </a:xfrm>
-        </p:grpSpPr>
-        <p:sp>
-          <p:nvSpPr>
-            <p:cNvPr name="Freeform 8" id="8"/>
-            <p:cNvSpPr/>
-            <p:nvPr/>
-          </p:nvSpPr>
-          <p:spPr>
-            <a:xfrm flipH="false" flipV="false" rot="0">
-              <a:off x="0" y="0"/>
-              <a:ext cx="481914" cy="481914"/>
-            </a:xfrm>
-            <a:custGeom>
-              <a:avLst/>
-              <a:gdLst/>
-              <a:ahLst/>
-              <a:cxnLst/>
-              <a:rect r="r" b="b" t="t" l="l"/>
-              <a:pathLst>
-                <a:path h="481914" w="481914">
-                  <a:moveTo>
-                    <a:pt x="0" y="0"/>
-                  </a:moveTo>
-                  <a:lnTo>
-                    <a:pt x="481914" y="0"/>
-                  </a:lnTo>
-                  <a:lnTo>
-                    <a:pt x="481914" y="481914"/>
-                  </a:lnTo>
-                  <a:lnTo>
-                    <a:pt x="0" y="481914"/>
-                  </a:lnTo>
-                  <a:lnTo>
-                    <a:pt x="0" y="0"/>
-                  </a:lnTo>
-                  <a:close/>
-                </a:path>
-              </a:pathLst>
-            </a:custGeom>
-            <a:blipFill>
-              <a:blip r:embed="rId4">
-                <a:extLst>
-                  <a:ext uri="{96DAC541-7B7A-43D3-8B79-37D633B846F1}">
-                    <asvg:svgBlip xmlns:asvg="http://schemas.microsoft.com/office/drawing/2016/SVG/main" r:embed="rId5"/>
-                  </a:ext>
-                </a:extLst>
-              </a:blip>
-              <a:stretch>
-                <a:fillRect l="0" t="0" r="0" b="0"/>
-              </a:stretch>
-            </a:blipFill>
-          </p:spPr>
-        </p:sp>
-        <p:sp>
-          <p:nvSpPr>
-            <p:cNvPr name="TextBox 9" id="9"/>
-            <p:cNvSpPr txBox="true"/>
-            <p:nvPr/>
-          </p:nvSpPr>
-          <p:spPr>
-            <a:xfrm rot="0">
-              <a:off x="762184" y="114790"/>
-              <a:ext cx="3370857" cy="271146"/>
-            </a:xfrm>
-            <a:prstGeom prst="rect">
-              <a:avLst/>
-            </a:prstGeom>
-          </p:spPr>
-          <p:txBody>
-            <a:bodyPr anchor="t" rtlCol="false" tIns="0" lIns="0" bIns="0" rIns="0">
-              <a:spAutoFit/>
-            </a:bodyPr>
-            <a:lstStyle/>
-            <a:p>
-              <a:pPr algn="l">
-                <a:lnSpc>
-                  <a:spcPts val="1305"/>
-                </a:lnSpc>
-              </a:pPr>
-              <a:r>
-                <a:rPr lang="en-US" sz="1500" spc="-73">
-                  <a:solidFill>
-                    <a:srgbClr val="000000"/>
-                  </a:solidFill>
-                  <a:latin typeface="Arial"/>
-                  <a:ea typeface="Arial"/>
-                  <a:cs typeface="Arial"/>
-                  <a:sym typeface="Arial"/>
-                </a:rPr>
-                <a:t>@thelook europe e-commerce</a:t>
-              </a:r>
-            </a:p>
-          </p:txBody>
-        </p:sp>
-      </p:grpSp>
-      <p:grpSp>
-        <p:nvGrpSpPr>
-          <p:cNvPr name="Group 10" id="10"/>
-          <p:cNvGrpSpPr/>
-          <p:nvPr/>
-        </p:nvGrpSpPr>
-        <p:grpSpPr>
-          <a:xfrm rot="0">
-            <a:off x="1028700" y="1028700"/>
-            <a:ext cx="4484785" cy="361435"/>
-            <a:chOff x="0" y="0"/>
-            <a:chExt cx="5979713" cy="481914"/>
-          </a:xfrm>
-        </p:grpSpPr>
-        <p:sp>
-          <p:nvSpPr>
-            <p:cNvPr name="Freeform 11" id="11"/>
-            <p:cNvSpPr/>
-            <p:nvPr/>
-          </p:nvSpPr>
-          <p:spPr>
-            <a:xfrm flipH="false" flipV="false" rot="0">
-              <a:off x="0" y="0"/>
-              <a:ext cx="481914" cy="481914"/>
-            </a:xfrm>
-            <a:custGeom>
-              <a:avLst/>
-              <a:gdLst/>
-              <a:ahLst/>
-              <a:cxnLst/>
-              <a:rect r="r" b="b" t="t" l="l"/>
-              <a:pathLst>
-                <a:path h="481914" w="481914">
-                  <a:moveTo>
-                    <a:pt x="0" y="0"/>
-                  </a:moveTo>
-                  <a:lnTo>
-                    <a:pt x="481914" y="0"/>
-                  </a:lnTo>
-                  <a:lnTo>
-                    <a:pt x="481914" y="481914"/>
-                  </a:lnTo>
-                  <a:lnTo>
-                    <a:pt x="0" y="481914"/>
-                  </a:lnTo>
-                  <a:lnTo>
-                    <a:pt x="0" y="0"/>
-                  </a:lnTo>
-                  <a:close/>
-                </a:path>
-              </a:pathLst>
-            </a:custGeom>
-            <a:blipFill>
-              <a:blip r:embed="rId4">
-                <a:extLst>
-                  <a:ext uri="{96DAC541-7B7A-43D3-8B79-37D633B846F1}">
-                    <asvg:svgBlip xmlns:asvg="http://schemas.microsoft.com/office/drawing/2016/SVG/main" r:embed="rId5"/>
-                  </a:ext>
-                </a:extLst>
-              </a:blip>
-              <a:stretch>
-                <a:fillRect l="0" t="0" r="0" b="0"/>
-              </a:stretch>
-            </a:blipFill>
-          </p:spPr>
-        </p:sp>
-        <p:sp>
-          <p:nvSpPr>
-            <p:cNvPr name="TextBox 12" id="12"/>
-            <p:cNvSpPr txBox="true"/>
-            <p:nvPr/>
-          </p:nvSpPr>
-          <p:spPr>
-            <a:xfrm rot="0">
-              <a:off x="762184" y="4738"/>
-              <a:ext cx="5217529" cy="415287"/>
-            </a:xfrm>
-            <a:prstGeom prst="rect">
-              <a:avLst/>
-            </a:prstGeom>
-          </p:spPr>
-          <p:txBody>
-            <a:bodyPr anchor="t" rtlCol="false" tIns="0" lIns="0" bIns="0" rIns="0">
-              <a:spAutoFit/>
-            </a:bodyPr>
-            <a:lstStyle/>
-            <a:p>
-              <a:pPr algn="ctr">
-                <a:lnSpc>
-                  <a:spcPts val="2520"/>
-                </a:lnSpc>
-                <a:spcBef>
-                  <a:spcPct val="0"/>
-                </a:spcBef>
-              </a:pPr>
-              <a:r>
-                <a:rPr lang="en-US" b="true" sz="1800" spc="-88">
-                  <a:solidFill>
-                    <a:srgbClr val="000000"/>
-                  </a:solidFill>
-                  <a:latin typeface="Arial Bold"/>
-                  <a:ea typeface="Arial Bold"/>
-                  <a:cs typeface="Arial Bold"/>
-                  <a:sym typeface="Arial Bold"/>
-                </a:rPr>
-                <a:t>TheLook - Women France 2023 vs 2024 </a:t>
-              </a:r>
-            </a:p>
-          </p:txBody>
-        </p:sp>
-      </p:grpSp>
-      <p:sp>
-        <p:nvSpPr>
-          <p:cNvPr name="TextBox 13" id="13"/>
-          <p:cNvSpPr txBox="true"/>
-          <p:nvPr/>
-        </p:nvSpPr>
-        <p:spPr>
-          <a:xfrm rot="0">
-            <a:off x="1209418" y="1840794"/>
-            <a:ext cx="5311098" cy="355473"/>
-          </a:xfrm>
-          <a:prstGeom prst="rect">
-            <a:avLst/>
-          </a:prstGeom>
-        </p:spPr>
-        <p:txBody>
-          <a:bodyPr anchor="t" rtlCol="false" tIns="0" lIns="0" bIns="0" rIns="0">
-            <a:spAutoFit/>
-          </a:bodyPr>
-          <a:lstStyle/>
-          <a:p>
-            <a:pPr algn="l">
-              <a:lnSpc>
-                <a:spcPts val="2435"/>
-              </a:lnSpc>
-            </a:pPr>
-            <a:r>
-              <a:rPr lang="en-US" sz="2799" spc="-137" b="true">
-                <a:solidFill>
-                  <a:srgbClr val="000000"/>
-                </a:solidFill>
-                <a:latin typeface="Arial Bold"/>
-                <a:ea typeface="Arial Bold"/>
-                <a:cs typeface="Arial Bold"/>
-                <a:sym typeface="Arial Bold"/>
-              </a:rPr>
-              <a:t>Top marques &amp; Catégories par CA</a:t>
-            </a:r>
-          </a:p>
-        </p:txBody>
-      </p:sp>
-      <p:sp>
-        <p:nvSpPr>
-          <p:cNvPr name="TextBox 14" id="14"/>
-          <p:cNvSpPr txBox="true"/>
-          <p:nvPr/>
-        </p:nvSpPr>
-        <p:spPr>
-          <a:xfrm rot="0">
-            <a:off x="1600338" y="6673825"/>
-            <a:ext cx="6899773" cy="2047875"/>
-          </a:xfrm>
-          <a:prstGeom prst="rect">
-            <a:avLst/>
-          </a:prstGeom>
-        </p:spPr>
-        <p:txBody>
-          <a:bodyPr anchor="t" rtlCol="false" tIns="0" lIns="0" bIns="0" rIns="0">
-            <a:spAutoFit/>
-          </a:bodyPr>
-          <a:lstStyle/>
-          <a:p>
-            <a:pPr algn="just">
-              <a:lnSpc>
-                <a:spcPts val="2239"/>
-              </a:lnSpc>
-            </a:pPr>
-            <a:r>
-              <a:rPr lang="en-US" b="true" sz="1599" spc="-78" u="sng">
-                <a:solidFill>
-                  <a:srgbClr val="000000"/>
-                </a:solidFill>
-                <a:latin typeface="Arial Bold"/>
-                <a:ea typeface="Arial Bold"/>
-                <a:cs typeface="Arial Bold"/>
-                <a:sym typeface="Arial Bold"/>
-              </a:rPr>
-              <a:t>Principales constats :</a:t>
-            </a:r>
-          </a:p>
-          <a:p>
-            <a:pPr algn="just">
-              <a:lnSpc>
-                <a:spcPts val="2239"/>
-              </a:lnSpc>
-            </a:pPr>
-          </a:p>
-          <a:p>
-            <a:pPr algn="l" marL="302261" indent="-151130" lvl="1">
-              <a:lnSpc>
-                <a:spcPts val="1960"/>
-              </a:lnSpc>
-              <a:buFont typeface="Arial"/>
-              <a:buChar char="•"/>
-            </a:pPr>
-            <a:r>
-              <a:rPr lang="en-US" sz="1400" spc="-68">
-                <a:solidFill>
-                  <a:srgbClr val="000000"/>
-                </a:solidFill>
-                <a:latin typeface="Arial"/>
-                <a:ea typeface="Arial"/>
-                <a:cs typeface="Arial"/>
-                <a:sym typeface="Arial"/>
-              </a:rPr>
-              <a:t>Outerwear &amp; Coats : CA 3 148 € + marg</a:t>
-            </a:r>
-            <a:r>
-              <a:rPr lang="en-US" sz="1400" spc="-68">
-                <a:solidFill>
-                  <a:srgbClr val="000000"/>
-                </a:solidFill>
-                <a:latin typeface="Arial"/>
-                <a:ea typeface="Arial"/>
-                <a:cs typeface="Arial"/>
-                <a:sym typeface="Arial"/>
-              </a:rPr>
-              <a:t>e 55,2% = c</a:t>
-            </a:r>
-            <a:r>
-              <a:rPr lang="en-US" sz="1400" spc="-68">
-                <a:solidFill>
-                  <a:srgbClr val="000000"/>
-                </a:solidFill>
-                <a:latin typeface="Arial"/>
-                <a:ea typeface="Arial"/>
-                <a:cs typeface="Arial"/>
-                <a:sym typeface="Arial"/>
-              </a:rPr>
-              <a:t>atégorie champion</a:t>
-            </a:r>
-          </a:p>
-          <a:p>
-            <a:pPr algn="l" marL="302261" indent="-151130" lvl="1">
-              <a:lnSpc>
-                <a:spcPts val="1960"/>
-              </a:lnSpc>
-              <a:buFont typeface="Arial"/>
-              <a:buChar char="•"/>
-            </a:pPr>
-            <a:r>
-              <a:rPr lang="en-US" sz="1400" spc="-68">
-                <a:solidFill>
-                  <a:srgbClr val="000000"/>
-                </a:solidFill>
-                <a:latin typeface="Arial"/>
-                <a:ea typeface="Arial"/>
-                <a:cs typeface="Arial"/>
-                <a:sym typeface="Arial"/>
-              </a:rPr>
-              <a:t>Intimates : CA 2 259 € (2e) avec fort volume (72 lignes Complete)</a:t>
-            </a:r>
-          </a:p>
-          <a:p>
-            <a:pPr algn="l" marL="302261" indent="-151130" lvl="1">
-              <a:lnSpc>
-                <a:spcPts val="1960"/>
-              </a:lnSpc>
-              <a:buFont typeface="Arial"/>
-              <a:buChar char="•"/>
-            </a:pPr>
-            <a:r>
-              <a:rPr lang="en-US" sz="1400" spc="-68">
-                <a:solidFill>
-                  <a:srgbClr val="000000"/>
-                </a:solidFill>
-                <a:latin typeface="Arial"/>
-                <a:ea typeface="Arial"/>
-                <a:cs typeface="Arial"/>
-                <a:sym typeface="Arial"/>
-              </a:rPr>
-              <a:t>The North Face : 1 211 € de CA — marque dominante</a:t>
-            </a:r>
-          </a:p>
-          <a:p>
-            <a:pPr algn="l" marL="302261" indent="-151130" lvl="1">
-              <a:lnSpc>
-                <a:spcPts val="1960"/>
-              </a:lnSpc>
-              <a:buFont typeface="Arial"/>
-              <a:buChar char="•"/>
-            </a:pPr>
-            <a:r>
-              <a:rPr lang="en-US" sz="1400" spc="-68">
-                <a:solidFill>
-                  <a:srgbClr val="000000"/>
-                </a:solidFill>
-                <a:latin typeface="Arial"/>
-                <a:ea typeface="Arial"/>
-                <a:cs typeface="Arial"/>
-                <a:sym typeface="Arial"/>
-              </a:rPr>
-              <a:t>Arc'teryx + PAIGE = 35% du CA marques Top 10</a:t>
-            </a:r>
-          </a:p>
-          <a:p>
-            <a:pPr algn="l" marL="302261" indent="-151130" lvl="1">
-              <a:lnSpc>
-                <a:spcPts val="1960"/>
-              </a:lnSpc>
-              <a:buFont typeface="Arial"/>
-              <a:buChar char="•"/>
-            </a:pPr>
-            <a:r>
-              <a:rPr lang="en-US" sz="1400" spc="-68">
-                <a:solidFill>
-                  <a:srgbClr val="000000"/>
-                </a:solidFill>
-                <a:latin typeface="Arial"/>
-                <a:ea typeface="Arial"/>
-                <a:cs typeface="Arial"/>
-                <a:sym typeface="Arial"/>
-              </a:rPr>
-              <a:t>Blazers &amp; Jackets : taux de marge 61,8% mais faible CA — potentiel sous-exploité</a:t>
-            </a:r>
-          </a:p>
-          <a:p>
-            <a:pPr algn="l" marL="302261" indent="-151130" lvl="1">
-              <a:lnSpc>
-                <a:spcPts val="1960"/>
-              </a:lnSpc>
-              <a:spcBef>
-                <a:spcPct val="0"/>
-              </a:spcBef>
-              <a:buFont typeface="Arial"/>
-              <a:buChar char="•"/>
-            </a:pPr>
-            <a:r>
-              <a:rPr lang="en-US" sz="1400" spc="-68">
-                <a:solidFill>
-                  <a:srgbClr val="000000"/>
-                </a:solidFill>
-                <a:latin typeface="Arial"/>
-                <a:ea typeface="Arial"/>
-                <a:cs typeface="Arial"/>
-                <a:sym typeface="Arial"/>
-              </a:rPr>
-              <a:t>Swim : meilleur taux de marge (59,1%) — à développer campagne été</a:t>
-            </a:r>
-          </a:p>
-        </p:txBody>
-      </p:sp>
-      <p:sp>
-        <p:nvSpPr>
-          <p:cNvPr name="TextBox 15" id="15"/>
-          <p:cNvSpPr txBox="true"/>
-          <p:nvPr/>
-        </p:nvSpPr>
-        <p:spPr>
-          <a:xfrm rot="0">
-            <a:off x="9291195" y="6686710"/>
-            <a:ext cx="6682139" cy="2352675"/>
-          </a:xfrm>
-          <a:prstGeom prst="rect">
-            <a:avLst/>
-          </a:prstGeom>
-        </p:spPr>
-        <p:txBody>
-          <a:bodyPr anchor="t" rtlCol="false" tIns="0" lIns="0" bIns="0" rIns="0">
-            <a:spAutoFit/>
-          </a:bodyPr>
-          <a:lstStyle/>
-          <a:p>
-            <a:pPr algn="just">
-              <a:lnSpc>
-                <a:spcPts val="2239"/>
-              </a:lnSpc>
-            </a:pPr>
-            <a:r>
-              <a:rPr lang="en-US" b="true" sz="1599" spc="-78" u="sng">
-                <a:solidFill>
-                  <a:srgbClr val="000000"/>
-                </a:solidFill>
-                <a:latin typeface="Arial Bold"/>
-                <a:ea typeface="Arial Bold"/>
-                <a:cs typeface="Arial Bold"/>
-                <a:sym typeface="Arial Bold"/>
-              </a:rPr>
-              <a:t>Insight clé :</a:t>
-            </a:r>
-          </a:p>
-          <a:p>
-            <a:pPr algn="just">
-              <a:lnSpc>
-                <a:spcPts val="2239"/>
-              </a:lnSpc>
-            </a:pPr>
-          </a:p>
-          <a:p>
-            <a:pPr algn="l" marL="302261" indent="-151130" lvl="1">
-              <a:lnSpc>
-                <a:spcPts val="1960"/>
-              </a:lnSpc>
-              <a:buFont typeface="Arial"/>
-              <a:buChar char="•"/>
-            </a:pPr>
-            <a:r>
-              <a:rPr lang="en-US" sz="1400" spc="-68">
-                <a:solidFill>
-                  <a:srgbClr val="000000"/>
-                </a:solidFill>
-                <a:latin typeface="Arial"/>
-                <a:ea typeface="Arial"/>
-                <a:cs typeface="Arial"/>
-                <a:sym typeface="Arial"/>
-              </a:rPr>
-              <a:t>Outerwear &amp; Coats cumule fort CA ET forte marge : priorité absolue pour les investissements marketing.</a:t>
-            </a:r>
-          </a:p>
-          <a:p>
-            <a:pPr algn="l">
-              <a:lnSpc>
-                <a:spcPts val="1960"/>
-              </a:lnSpc>
-            </a:pPr>
-          </a:p>
-          <a:p>
-            <a:pPr algn="just">
-              <a:lnSpc>
-                <a:spcPts val="2239"/>
-              </a:lnSpc>
-            </a:pPr>
-            <a:r>
-              <a:rPr lang="en-US" b="true" sz="1599" spc="-78" u="sng">
-                <a:solidFill>
-                  <a:srgbClr val="000000"/>
-                </a:solidFill>
-                <a:latin typeface="Arial Bold"/>
-                <a:ea typeface="Arial Bold"/>
-                <a:cs typeface="Arial Bold"/>
-                <a:sym typeface="Arial Bold"/>
-              </a:rPr>
-              <a:t>Recommandations :</a:t>
-            </a:r>
-          </a:p>
-          <a:p>
-            <a:pPr algn="just">
-              <a:lnSpc>
-                <a:spcPts val="2239"/>
-              </a:lnSpc>
-            </a:pPr>
-          </a:p>
-          <a:p>
-            <a:pPr algn="l" marL="302261" indent="-151130" lvl="1">
-              <a:lnSpc>
-                <a:spcPts val="1960"/>
-              </a:lnSpc>
-              <a:buFont typeface="Arial"/>
-              <a:buChar char="•"/>
-            </a:pPr>
-            <a:r>
-              <a:rPr lang="en-US" sz="1400" spc="-68">
-                <a:solidFill>
-                  <a:srgbClr val="000000"/>
-                </a:solidFill>
-                <a:latin typeface="Arial"/>
-                <a:ea typeface="Arial"/>
-                <a:cs typeface="Arial"/>
-                <a:sym typeface="Arial"/>
-              </a:rPr>
-              <a:t>Concentrer le budget acquisition sur Outerwear, Swim et Accessories. </a:t>
-            </a:r>
-          </a:p>
-          <a:p>
-            <a:pPr algn="l" marL="302261" indent="-151130" lvl="1">
-              <a:lnSpc>
-                <a:spcPts val="1960"/>
-              </a:lnSpc>
-              <a:spcBef>
-                <a:spcPct val="0"/>
-              </a:spcBef>
-              <a:buFont typeface="Arial"/>
-              <a:buChar char="•"/>
-            </a:pPr>
-            <a:r>
-              <a:rPr lang="en-US" sz="1400" spc="-68">
-                <a:solidFill>
-                  <a:srgbClr val="000000"/>
-                </a:solidFill>
-                <a:latin typeface="Arial"/>
-                <a:ea typeface="Arial"/>
-                <a:cs typeface="Arial"/>
-                <a:sym typeface="Arial"/>
-              </a:rPr>
-              <a:t>Développer Blazers &amp; Jackets (forte marge, faible CA = visibilité insuffisante)</a:t>
-            </a:r>
-            <a:r>
-              <a:rPr lang="en-US" b="true" sz="1400" spc="-68" u="sng">
-                <a:solidFill>
-                  <a:srgbClr val="000000"/>
-                </a:solidFill>
-                <a:latin typeface="Arial Bold"/>
-                <a:ea typeface="Arial Bold"/>
-                <a:cs typeface="Arial Bold"/>
-                <a:sym typeface="Arial Bold"/>
-              </a:rPr>
-              <a:t>.</a:t>
-            </a:r>
-          </a:p>
-        </p:txBody>
-      </p:sp>
-      <p:sp>
-        <p:nvSpPr>
-          <p:cNvPr name="Freeform 16" id="16"/>
-          <p:cNvSpPr/>
-          <p:nvPr/>
-        </p:nvSpPr>
-        <p:spPr>
-          <a:xfrm flipH="false" flipV="false" rot="0">
             <a:off x="17108048" y="9057167"/>
             <a:ext cx="302503" cy="402265"/>
           </a:xfrm>
@@ -6352,10 +6352,10 @@
             </a:pathLst>
           </a:custGeom>
           <a:blipFill>
-            <a:blip r:embed="rId6">
+            <a:blip r:embed="rId8">
               <a:extLst>
                 <a:ext uri="{96DAC541-7B7A-43D3-8B79-37D633B846F1}">
-                  <asvg:svgBlip xmlns:asvg="http://schemas.microsoft.com/office/drawing/2016/SVG/main" r:embed="rId7"/>
+                  <asvg:svgBlip xmlns:asvg="http://schemas.microsoft.com/office/drawing/2016/SVG/main" r:embed="rId9"/>
                 </a:ext>
               </a:extLst>
             </a:blip>
@@ -6691,7 +6691,7 @@
                 <a:cs typeface="Arial Bold"/>
                 <a:sym typeface="Arial Bold"/>
               </a:rPr>
-              <a:t>Fidélisation client &amp; Taux de ré-achat </a:t>
+              <a:t>Taux de ré-achat &amp; Fidélisation client</a:t>
             </a:r>
           </a:p>
         </p:txBody>

--- a/slides/Soutenance_20min.pptx
+++ b/slides/Soutenance_20min.pptx
@@ -4645,6 +4645,58 @@
           </a:blipFill>
         </p:spPr>
       </p:sp>
+      <p:sp>
+        <p:nvSpPr>
+          <p:cNvPr name="Freeform 13" id="13"/>
+          <p:cNvSpPr/>
+          <p:nvPr/>
+        </p:nvSpPr>
+        <p:spPr>
+          <a:xfrm flipH="true" flipV="true" rot="0">
+            <a:off x="16822619" y="1028700"/>
+            <a:ext cx="436681" cy="339023"/>
+          </a:xfrm>
+          <a:custGeom>
+            <a:avLst/>
+            <a:gdLst/>
+            <a:ahLst/>
+            <a:cxnLst/>
+            <a:rect r="r" b="b" t="t" l="l"/>
+            <a:pathLst>
+              <a:path h="339023" w="436681">
+                <a:moveTo>
+                  <a:pt x="436681" y="339023"/>
+                </a:moveTo>
+                <a:lnTo>
+                  <a:pt x="0" y="339023"/>
+                </a:lnTo>
+                <a:lnTo>
+                  <a:pt x="0" y="0"/>
+                </a:lnTo>
+                <a:lnTo>
+                  <a:pt x="436681" y="0"/>
+                </a:lnTo>
+                <a:lnTo>
+                  <a:pt x="436681" y="339023"/>
+                </a:lnTo>
+                <a:close/>
+              </a:path>
+            </a:pathLst>
+          </a:custGeom>
+          <a:blipFill>
+            <a:blip r:embed="rId8">
+              <a:extLst>
+                <a:ext uri="{96DAC541-7B7A-43D3-8B79-37D633B846F1}">
+                  <asvg:svgBlip xmlns:asvg="http://schemas.microsoft.com/office/drawing/2016/SVG/main" r:embed="rId9"/>
+                </a:ext>
+              </a:extLst>
+            </a:blip>
+            <a:stretch>
+              <a:fillRect l="0" t="0" r="0" b="0"/>
+            </a:stretch>
+          </a:blipFill>
+        </p:spPr>
+      </p:sp>
     </p:spTree>
   </p:cSld>
   <p:clrMapOvr>
@@ -5507,6 +5559,58 @@
               <a:extLst>
                 <a:ext uri="{96DAC541-7B7A-43D3-8B79-37D633B846F1}">
                   <asvg:svgBlip xmlns:asvg="http://schemas.microsoft.com/office/drawing/2016/SVG/main" r:embed="rId7"/>
+                </a:ext>
+              </a:extLst>
+            </a:blip>
+            <a:stretch>
+              <a:fillRect l="0" t="0" r="0" b="0"/>
+            </a:stretch>
+          </a:blipFill>
+        </p:spPr>
+      </p:sp>
+      <p:sp>
+        <p:nvSpPr>
+          <p:cNvPr name="Freeform 17" id="17"/>
+          <p:cNvSpPr/>
+          <p:nvPr/>
+        </p:nvSpPr>
+        <p:spPr>
+          <a:xfrm flipH="true" flipV="true" rot="0">
+            <a:off x="16822619" y="1028700"/>
+            <a:ext cx="436681" cy="339023"/>
+          </a:xfrm>
+          <a:custGeom>
+            <a:avLst/>
+            <a:gdLst/>
+            <a:ahLst/>
+            <a:cxnLst/>
+            <a:rect r="r" b="b" t="t" l="l"/>
+            <a:pathLst>
+              <a:path h="339023" w="436681">
+                <a:moveTo>
+                  <a:pt x="436681" y="339023"/>
+                </a:moveTo>
+                <a:lnTo>
+                  <a:pt x="0" y="339023"/>
+                </a:lnTo>
+                <a:lnTo>
+                  <a:pt x="0" y="0"/>
+                </a:lnTo>
+                <a:lnTo>
+                  <a:pt x="436681" y="0"/>
+                </a:lnTo>
+                <a:lnTo>
+                  <a:pt x="436681" y="339023"/>
+                </a:lnTo>
+                <a:close/>
+              </a:path>
+            </a:pathLst>
+          </a:custGeom>
+          <a:blipFill>
+            <a:blip r:embed="rId8">
+              <a:extLst>
+                <a:ext uri="{96DAC541-7B7A-43D3-8B79-37D633B846F1}">
+                  <asvg:svgBlip xmlns:asvg="http://schemas.microsoft.com/office/drawing/2016/SVG/main" r:embed="rId9"/>
                 </a:ext>
               </a:extLst>
             </a:blip>
@@ -6365,6 +6469,58 @@
           </a:blipFill>
         </p:spPr>
       </p:sp>
+      <p:sp>
+        <p:nvSpPr>
+          <p:cNvPr name="Freeform 15" id="15"/>
+          <p:cNvSpPr/>
+          <p:nvPr/>
+        </p:nvSpPr>
+        <p:spPr>
+          <a:xfrm flipH="true" flipV="true" rot="0">
+            <a:off x="16822619" y="1028700"/>
+            <a:ext cx="436681" cy="339023"/>
+          </a:xfrm>
+          <a:custGeom>
+            <a:avLst/>
+            <a:gdLst/>
+            <a:ahLst/>
+            <a:cxnLst/>
+            <a:rect r="r" b="b" t="t" l="l"/>
+            <a:pathLst>
+              <a:path h="339023" w="436681">
+                <a:moveTo>
+                  <a:pt x="436681" y="339023"/>
+                </a:moveTo>
+                <a:lnTo>
+                  <a:pt x="0" y="339023"/>
+                </a:lnTo>
+                <a:lnTo>
+                  <a:pt x="0" y="0"/>
+                </a:lnTo>
+                <a:lnTo>
+                  <a:pt x="436681" y="0"/>
+                </a:lnTo>
+                <a:lnTo>
+                  <a:pt x="436681" y="339023"/>
+                </a:lnTo>
+                <a:close/>
+              </a:path>
+            </a:pathLst>
+          </a:custGeom>
+          <a:blipFill>
+            <a:blip r:embed="rId10">
+              <a:extLst>
+                <a:ext uri="{96DAC541-7B7A-43D3-8B79-37D633B846F1}">
+                  <asvg:svgBlip xmlns:asvg="http://schemas.microsoft.com/office/drawing/2016/SVG/main" r:embed="rId11"/>
+                </a:ext>
+              </a:extLst>
+            </a:blip>
+            <a:stretch>
+              <a:fillRect l="0" t="0" r="0" b="0"/>
+            </a:stretch>
+          </a:blipFill>
+        </p:spPr>
+      </p:sp>
     </p:spTree>
   </p:cSld>
   <p:clrMapOvr>
@@ -7118,6 +7274,58 @@
               <a:extLst>
                 <a:ext uri="{96DAC541-7B7A-43D3-8B79-37D633B846F1}">
                   <asvg:svgBlip xmlns:asvg="http://schemas.microsoft.com/office/drawing/2016/SVG/main" r:embed="rId7"/>
+                </a:ext>
+              </a:extLst>
+            </a:blip>
+            <a:stretch>
+              <a:fillRect l="0" t="0" r="0" b="0"/>
+            </a:stretch>
+          </a:blipFill>
+        </p:spPr>
+      </p:sp>
+      <p:sp>
+        <p:nvSpPr>
+          <p:cNvPr name="Freeform 13" id="13"/>
+          <p:cNvSpPr/>
+          <p:nvPr/>
+        </p:nvSpPr>
+        <p:spPr>
+          <a:xfrm flipH="true" flipV="true" rot="0">
+            <a:off x="16822619" y="1028700"/>
+            <a:ext cx="436681" cy="339023"/>
+          </a:xfrm>
+          <a:custGeom>
+            <a:avLst/>
+            <a:gdLst/>
+            <a:ahLst/>
+            <a:cxnLst/>
+            <a:rect r="r" b="b" t="t" l="l"/>
+            <a:pathLst>
+              <a:path h="339023" w="436681">
+                <a:moveTo>
+                  <a:pt x="436681" y="339023"/>
+                </a:moveTo>
+                <a:lnTo>
+                  <a:pt x="0" y="339023"/>
+                </a:lnTo>
+                <a:lnTo>
+                  <a:pt x="0" y="0"/>
+                </a:lnTo>
+                <a:lnTo>
+                  <a:pt x="436681" y="0"/>
+                </a:lnTo>
+                <a:lnTo>
+                  <a:pt x="436681" y="339023"/>
+                </a:lnTo>
+                <a:close/>
+              </a:path>
+            </a:pathLst>
+          </a:custGeom>
+          <a:blipFill>
+            <a:blip r:embed="rId8">
+              <a:extLst>
+                <a:ext uri="{96DAC541-7B7A-43D3-8B79-37D633B846F1}">
+                  <asvg:svgBlip xmlns:asvg="http://schemas.microsoft.com/office/drawing/2016/SVG/main" r:embed="rId9"/>
                 </a:ext>
               </a:extLst>
             </a:blip>
@@ -7909,6 +8117,58 @@
               <a:extLst>
                 <a:ext uri="{96DAC541-7B7A-43D3-8B79-37D633B846F1}">
                   <asvg:svgBlip xmlns:asvg="http://schemas.microsoft.com/office/drawing/2016/SVG/main" r:embed="rId9"/>
+                </a:ext>
+              </a:extLst>
+            </a:blip>
+            <a:stretch>
+              <a:fillRect l="0" t="0" r="0" b="0"/>
+            </a:stretch>
+          </a:blipFill>
+        </p:spPr>
+      </p:sp>
+      <p:sp>
+        <p:nvSpPr>
+          <p:cNvPr name="Freeform 14" id="14"/>
+          <p:cNvSpPr/>
+          <p:nvPr/>
+        </p:nvSpPr>
+        <p:spPr>
+          <a:xfrm flipH="true" flipV="true" rot="0">
+            <a:off x="16822619" y="1028700"/>
+            <a:ext cx="436681" cy="339023"/>
+          </a:xfrm>
+          <a:custGeom>
+            <a:avLst/>
+            <a:gdLst/>
+            <a:ahLst/>
+            <a:cxnLst/>
+            <a:rect r="r" b="b" t="t" l="l"/>
+            <a:pathLst>
+              <a:path h="339023" w="436681">
+                <a:moveTo>
+                  <a:pt x="436681" y="339023"/>
+                </a:moveTo>
+                <a:lnTo>
+                  <a:pt x="0" y="339023"/>
+                </a:lnTo>
+                <a:lnTo>
+                  <a:pt x="0" y="0"/>
+                </a:lnTo>
+                <a:lnTo>
+                  <a:pt x="436681" y="0"/>
+                </a:lnTo>
+                <a:lnTo>
+                  <a:pt x="436681" y="339023"/>
+                </a:lnTo>
+                <a:close/>
+              </a:path>
+            </a:pathLst>
+          </a:custGeom>
+          <a:blipFill>
+            <a:blip r:embed="rId10">
+              <a:extLst>
+                <a:ext uri="{96DAC541-7B7A-43D3-8B79-37D633B846F1}">
+                  <asvg:svgBlip xmlns:asvg="http://schemas.microsoft.com/office/drawing/2016/SVG/main" r:embed="rId11"/>
                 </a:ext>
               </a:extLst>
             </a:blip>
@@ -10388,6 +10648,58 @@
           </a:blipFill>
         </p:spPr>
       </p:sp>
+      <p:sp>
+        <p:nvSpPr>
+          <p:cNvPr name="Freeform 59" id="59"/>
+          <p:cNvSpPr/>
+          <p:nvPr/>
+        </p:nvSpPr>
+        <p:spPr>
+          <a:xfrm flipH="true" flipV="true" rot="0">
+            <a:off x="16822619" y="1028700"/>
+            <a:ext cx="436681" cy="339023"/>
+          </a:xfrm>
+          <a:custGeom>
+            <a:avLst/>
+            <a:gdLst/>
+            <a:ahLst/>
+            <a:cxnLst/>
+            <a:rect r="r" b="b" t="t" l="l"/>
+            <a:pathLst>
+              <a:path h="339023" w="436681">
+                <a:moveTo>
+                  <a:pt x="436681" y="339023"/>
+                </a:moveTo>
+                <a:lnTo>
+                  <a:pt x="0" y="339023"/>
+                </a:lnTo>
+                <a:lnTo>
+                  <a:pt x="0" y="0"/>
+                </a:lnTo>
+                <a:lnTo>
+                  <a:pt x="436681" y="0"/>
+                </a:lnTo>
+                <a:lnTo>
+                  <a:pt x="436681" y="339023"/>
+                </a:lnTo>
+                <a:close/>
+              </a:path>
+            </a:pathLst>
+          </a:custGeom>
+          <a:blipFill>
+            <a:blip r:embed="rId16">
+              <a:extLst>
+                <a:ext uri="{96DAC541-7B7A-43D3-8B79-37D633B846F1}">
+                  <asvg:svgBlip xmlns:asvg="http://schemas.microsoft.com/office/drawing/2016/SVG/main" r:embed="rId17"/>
+                </a:ext>
+              </a:extLst>
+            </a:blip>
+            <a:stretch>
+              <a:fillRect l="0" t="0" r="0" b="0"/>
+            </a:stretch>
+          </a:blipFill>
+        </p:spPr>
+      </p:sp>
     </p:spTree>
   </p:cSld>
   <p:clrMapOvr>
@@ -11339,6 +11651,58 @@
           </p:txBody>
         </p:sp>
       </p:grpSp>
+      <p:sp>
+        <p:nvSpPr>
+          <p:cNvPr name="Freeform 9" id="9"/>
+          <p:cNvSpPr/>
+          <p:nvPr/>
+        </p:nvSpPr>
+        <p:spPr>
+          <a:xfrm flipH="true" flipV="true" rot="0">
+            <a:off x="16822619" y="1028700"/>
+            <a:ext cx="436681" cy="339023"/>
+          </a:xfrm>
+          <a:custGeom>
+            <a:avLst/>
+            <a:gdLst/>
+            <a:ahLst/>
+            <a:cxnLst/>
+            <a:rect r="r" b="b" t="t" l="l"/>
+            <a:pathLst>
+              <a:path h="339023" w="436681">
+                <a:moveTo>
+                  <a:pt x="436681" y="339023"/>
+                </a:moveTo>
+                <a:lnTo>
+                  <a:pt x="0" y="339023"/>
+                </a:lnTo>
+                <a:lnTo>
+                  <a:pt x="0" y="0"/>
+                </a:lnTo>
+                <a:lnTo>
+                  <a:pt x="436681" y="0"/>
+                </a:lnTo>
+                <a:lnTo>
+                  <a:pt x="436681" y="339023"/>
+                </a:lnTo>
+                <a:close/>
+              </a:path>
+            </a:pathLst>
+          </a:custGeom>
+          <a:blipFill>
+            <a:blip r:embed="rId4">
+              <a:extLst>
+                <a:ext uri="{96DAC541-7B7A-43D3-8B79-37D633B846F1}">
+                  <asvg:svgBlip xmlns:asvg="http://schemas.microsoft.com/office/drawing/2016/SVG/main" r:embed="rId5"/>
+                </a:ext>
+              </a:extLst>
+            </a:blip>
+            <a:stretch>
+              <a:fillRect l="0" t="0" r="0" b="0"/>
+            </a:stretch>
+          </a:blipFill>
+        </p:spPr>
+      </p:sp>
     </p:spTree>
   </p:cSld>
   <p:clrMapOvr>
@@ -11556,7 +11920,7 @@
                 <a:cs typeface="Arial Bold"/>
                 <a:sym typeface="Arial Bold"/>
               </a:rPr>
-              <a:t>Sommaire de la soutenance</a:t>
+              <a:t>Sommaire </a:t>
             </a:r>
           </a:p>
         </p:txBody>
@@ -13177,8 +13541,8 @@
         </p:nvSpPr>
         <p:spPr>
           <a:xfrm rot="0">
-            <a:off x="1560879" y="1035745"/>
-            <a:ext cx="3744441" cy="299720"/>
+            <a:off x="1610476" y="1035745"/>
+            <a:ext cx="3645247" cy="299720"/>
           </a:xfrm>
           <a:prstGeom prst="rect">
             <a:avLst/>
@@ -13208,10 +13572,62 @@
                 <a:cs typeface="Arial Bold"/>
                 <a:sym typeface="Arial Bold"/>
               </a:rPr>
-              <a:t>TheLook - Women France 2023 vs 2024 |</a:t>
+              <a:t>TheLook - Women France 2023 vs 2024</a:t>
             </a:r>
           </a:p>
         </p:txBody>
+      </p:sp>
+      <p:sp>
+        <p:nvSpPr>
+          <p:cNvPr name="Freeform 54" id="54"/>
+          <p:cNvSpPr/>
+          <p:nvPr/>
+        </p:nvSpPr>
+        <p:spPr>
+          <a:xfrm flipH="true" flipV="true" rot="0">
+            <a:off x="16822619" y="1028700"/>
+            <a:ext cx="436681" cy="339023"/>
+          </a:xfrm>
+          <a:custGeom>
+            <a:avLst/>
+            <a:gdLst/>
+            <a:ahLst/>
+            <a:cxnLst/>
+            <a:rect r="r" b="b" t="t" l="l"/>
+            <a:pathLst>
+              <a:path h="339023" w="436681">
+                <a:moveTo>
+                  <a:pt x="436681" y="339023"/>
+                </a:moveTo>
+                <a:lnTo>
+                  <a:pt x="0" y="339023"/>
+                </a:lnTo>
+                <a:lnTo>
+                  <a:pt x="0" y="0"/>
+                </a:lnTo>
+                <a:lnTo>
+                  <a:pt x="436681" y="0"/>
+                </a:lnTo>
+                <a:lnTo>
+                  <a:pt x="436681" y="339023"/>
+                </a:lnTo>
+                <a:close/>
+              </a:path>
+            </a:pathLst>
+          </a:custGeom>
+          <a:blipFill>
+            <a:blip r:embed="rId18">
+              <a:extLst>
+                <a:ext uri="{96DAC541-7B7A-43D3-8B79-37D633B846F1}">
+                  <asvg:svgBlip xmlns:asvg="http://schemas.microsoft.com/office/drawing/2016/SVG/main" r:embed="rId19"/>
+                </a:ext>
+              </a:extLst>
+            </a:blip>
+            <a:stretch>
+              <a:fillRect l="0" t="0" r="0" b="0"/>
+            </a:stretch>
+          </a:blipFill>
+        </p:spPr>
       </p:sp>
     </p:spTree>
   </p:cSld>
@@ -13747,7 +14163,7 @@
         <p:spPr>
           <a:xfrm rot="0">
             <a:off x="1547450" y="2834153"/>
-            <a:ext cx="8692127" cy="4726305"/>
+            <a:ext cx="8692127" cy="4411980"/>
           </a:xfrm>
           <a:prstGeom prst="rect">
             <a:avLst/>
@@ -13774,7 +14190,7 @@
                 <a:cs typeface="Arial"/>
                 <a:sym typeface="Arial"/>
               </a:rPr>
-              <a:t>TheLook est un site de vente en ligne de vêtements fictif développé par l'équipe Looker.</a:t>
+              <a:t>TheLook est un site de vente en ligne de vêtements développé par l'équipe Looker.</a:t>
             </a:r>
           </a:p>
           <a:p>
@@ -13826,19 +14242,7 @@
                 <a:cs typeface="Arial"/>
                 <a:sym typeface="Arial"/>
               </a:rPr>
-              <a:t>N</a:t>
-            </a:r>
-            <a:r>
-              <a:rPr lang="en-US" sz="1800" spc="-88">
-                <a:solidFill>
-                  <a:srgbClr val="000000"/>
-                </a:solidFill>
-                <a:latin typeface="Arial"/>
-                <a:ea typeface="Arial"/>
-                <a:cs typeface="Arial"/>
-                <a:sym typeface="Arial"/>
-              </a:rPr>
-              <a:t>ous endossons le rôle de Data Analyst au sein de « TheLook Europe ». La direction e‑commerce nous demande d’analyser la performance de l’activité sur un périmètre précis et de comparer l’année 2023 à l’année 2024 sous  le périmètre d’étude : France × Département « Women » × Période du 01/01/2023 au 31/12/2024.</a:t>
+              <a:t> La direction e‑commerce nous demande d’analyser la performance de l’activité sur un périmètre précis et de comparer l’année 2023 à l’année 2024 sous  le périmètre d’étude : France × Département « Women » × Période du 01/01/2023 au 31/12/2024.</a:t>
             </a:r>
           </a:p>
           <a:p>
@@ -15072,6 +15476,58 @@
           </p:txBody>
         </p:sp>
       </p:grpSp>
+      <p:sp>
+        <p:nvSpPr>
+          <p:cNvPr name="Freeform 36" id="36"/>
+          <p:cNvSpPr/>
+          <p:nvPr/>
+        </p:nvSpPr>
+        <p:spPr>
+          <a:xfrm flipH="true" flipV="true" rot="0">
+            <a:off x="16822619" y="1028700"/>
+            <a:ext cx="436681" cy="339023"/>
+          </a:xfrm>
+          <a:custGeom>
+            <a:avLst/>
+            <a:gdLst/>
+            <a:ahLst/>
+            <a:cxnLst/>
+            <a:rect r="r" b="b" t="t" l="l"/>
+            <a:pathLst>
+              <a:path h="339023" w="436681">
+                <a:moveTo>
+                  <a:pt x="436681" y="339023"/>
+                </a:moveTo>
+                <a:lnTo>
+                  <a:pt x="0" y="339023"/>
+                </a:lnTo>
+                <a:lnTo>
+                  <a:pt x="0" y="0"/>
+                </a:lnTo>
+                <a:lnTo>
+                  <a:pt x="436681" y="0"/>
+                </a:lnTo>
+                <a:lnTo>
+                  <a:pt x="436681" y="339023"/>
+                </a:lnTo>
+                <a:close/>
+              </a:path>
+            </a:pathLst>
+          </a:custGeom>
+          <a:blipFill>
+            <a:blip r:embed="rId6">
+              <a:extLst>
+                <a:ext uri="{96DAC541-7B7A-43D3-8B79-37D633B846F1}">
+                  <asvg:svgBlip xmlns:asvg="http://schemas.microsoft.com/office/drawing/2016/SVG/main" r:embed="rId7"/>
+                </a:ext>
+              </a:extLst>
+            </a:blip>
+            <a:stretch>
+              <a:fillRect l="0" t="0" r="0" b="0"/>
+            </a:stretch>
+          </a:blipFill>
+        </p:spPr>
+      </p:sp>
     </p:spTree>
   </p:cSld>
   <p:clrMapOvr>
@@ -17128,6 +17584,58 @@
           </a:p>
         </p:txBody>
       </p:sp>
+      <p:sp>
+        <p:nvSpPr>
+          <p:cNvPr name="Freeform 39" id="39"/>
+          <p:cNvSpPr/>
+          <p:nvPr/>
+        </p:nvSpPr>
+        <p:spPr>
+          <a:xfrm flipH="true" flipV="true" rot="0">
+            <a:off x="16822619" y="1028700"/>
+            <a:ext cx="436681" cy="339023"/>
+          </a:xfrm>
+          <a:custGeom>
+            <a:avLst/>
+            <a:gdLst/>
+            <a:ahLst/>
+            <a:cxnLst/>
+            <a:rect r="r" b="b" t="t" l="l"/>
+            <a:pathLst>
+              <a:path h="339023" w="436681">
+                <a:moveTo>
+                  <a:pt x="436681" y="339023"/>
+                </a:moveTo>
+                <a:lnTo>
+                  <a:pt x="0" y="339023"/>
+                </a:lnTo>
+                <a:lnTo>
+                  <a:pt x="0" y="0"/>
+                </a:lnTo>
+                <a:lnTo>
+                  <a:pt x="436681" y="0"/>
+                </a:lnTo>
+                <a:lnTo>
+                  <a:pt x="436681" y="339023"/>
+                </a:lnTo>
+                <a:close/>
+              </a:path>
+            </a:pathLst>
+          </a:custGeom>
+          <a:blipFill>
+            <a:blip r:embed="rId6">
+              <a:extLst>
+                <a:ext uri="{96DAC541-7B7A-43D3-8B79-37D633B846F1}">
+                  <asvg:svgBlip xmlns:asvg="http://schemas.microsoft.com/office/drawing/2016/SVG/main" r:embed="rId7"/>
+                </a:ext>
+              </a:extLst>
+            </a:blip>
+            <a:stretch>
+              <a:fillRect l="0" t="0" r="0" b="0"/>
+            </a:stretch>
+          </a:blipFill>
+        </p:spPr>
+      </p:sp>
     </p:spTree>
   </p:cSld>
   <p:clrMapOvr>
@@ -17902,6 +18410,58 @@
             </a:r>
           </a:p>
         </p:txBody>
+      </p:sp>
+      <p:sp>
+        <p:nvSpPr>
+          <p:cNvPr name="Freeform 11" id="11"/>
+          <p:cNvSpPr/>
+          <p:nvPr/>
+        </p:nvSpPr>
+        <p:spPr>
+          <a:xfrm flipH="true" flipV="true" rot="0">
+            <a:off x="16822619" y="1028700"/>
+            <a:ext cx="436681" cy="339023"/>
+          </a:xfrm>
+          <a:custGeom>
+            <a:avLst/>
+            <a:gdLst/>
+            <a:ahLst/>
+            <a:cxnLst/>
+            <a:rect r="r" b="b" t="t" l="l"/>
+            <a:pathLst>
+              <a:path h="339023" w="436681">
+                <a:moveTo>
+                  <a:pt x="436681" y="339023"/>
+                </a:moveTo>
+                <a:lnTo>
+                  <a:pt x="0" y="339023"/>
+                </a:lnTo>
+                <a:lnTo>
+                  <a:pt x="0" y="0"/>
+                </a:lnTo>
+                <a:lnTo>
+                  <a:pt x="436681" y="0"/>
+                </a:lnTo>
+                <a:lnTo>
+                  <a:pt x="436681" y="339023"/>
+                </a:lnTo>
+                <a:close/>
+              </a:path>
+            </a:pathLst>
+          </a:custGeom>
+          <a:blipFill>
+            <a:blip r:embed="rId7">
+              <a:extLst>
+                <a:ext uri="{96DAC541-7B7A-43D3-8B79-37D633B846F1}">
+                  <asvg:svgBlip xmlns:asvg="http://schemas.microsoft.com/office/drawing/2016/SVG/main" r:embed="rId8"/>
+                </a:ext>
+              </a:extLst>
+            </a:blip>
+            <a:stretch>
+              <a:fillRect l="0" t="0" r="0" b="0"/>
+            </a:stretch>
+          </a:blipFill>
+        </p:spPr>
       </p:sp>
     </p:spTree>
   </p:cSld>
@@ -18247,6 +18807,58 @@
               <a:extLst>
                 <a:ext uri="{96DAC541-7B7A-43D3-8B79-37D633B846F1}">
                   <asvg:svgBlip xmlns:asvg="http://schemas.microsoft.com/office/drawing/2016/SVG/main" r:embed="rId6"/>
+                </a:ext>
+              </a:extLst>
+            </a:blip>
+            <a:stretch>
+              <a:fillRect l="0" t="0" r="0" b="0"/>
+            </a:stretch>
+          </a:blipFill>
+        </p:spPr>
+      </p:sp>
+      <p:sp>
+        <p:nvSpPr>
+          <p:cNvPr name="Freeform 9" id="9"/>
+          <p:cNvSpPr/>
+          <p:nvPr/>
+        </p:nvSpPr>
+        <p:spPr>
+          <a:xfrm flipH="true" flipV="true" rot="0">
+            <a:off x="16822619" y="1028700"/>
+            <a:ext cx="436681" cy="339023"/>
+          </a:xfrm>
+          <a:custGeom>
+            <a:avLst/>
+            <a:gdLst/>
+            <a:ahLst/>
+            <a:cxnLst/>
+            <a:rect r="r" b="b" t="t" l="l"/>
+            <a:pathLst>
+              <a:path h="339023" w="436681">
+                <a:moveTo>
+                  <a:pt x="436681" y="339023"/>
+                </a:moveTo>
+                <a:lnTo>
+                  <a:pt x="0" y="339023"/>
+                </a:lnTo>
+                <a:lnTo>
+                  <a:pt x="0" y="0"/>
+                </a:lnTo>
+                <a:lnTo>
+                  <a:pt x="436681" y="0"/>
+                </a:lnTo>
+                <a:lnTo>
+                  <a:pt x="436681" y="339023"/>
+                </a:lnTo>
+                <a:close/>
+              </a:path>
+            </a:pathLst>
+          </a:custGeom>
+          <a:blipFill>
+            <a:blip r:embed="rId7">
+              <a:extLst>
+                <a:ext uri="{96DAC541-7B7A-43D3-8B79-37D633B846F1}">
+                  <asvg:svgBlip xmlns:asvg="http://schemas.microsoft.com/office/drawing/2016/SVG/main" r:embed="rId8"/>
                 </a:ext>
               </a:extLst>
             </a:blip>

--- a/slides/Soutenance_20min.pptx
+++ b/slides/Soutenance_20min.pptx
@@ -9358,7 +9358,7 @@
                 </a:pathLst>
               </a:custGeom>
               <a:solidFill>
-                <a:srgbClr val="E99842">
+                <a:srgbClr val="3779E3">
                   <a:alpha val="62745"/>
                 </a:srgbClr>
               </a:solidFill>
@@ -9591,7 +9591,7 @@
                 </a:pathLst>
               </a:custGeom>
               <a:solidFill>
-                <a:srgbClr val="E99842"/>
+                <a:srgbClr val="3779E3"/>
               </a:solidFill>
             </p:spPr>
           </p:sp>
@@ -9792,7 +9792,7 @@
                 </a:pathLst>
               </a:custGeom>
               <a:solidFill>
-                <a:srgbClr val="7ED957">
+                <a:srgbClr val="3779E3">
                   <a:alpha val="62745"/>
                 </a:srgbClr>
               </a:solidFill>
@@ -10025,7 +10025,7 @@
                 </a:pathLst>
               </a:custGeom>
               <a:solidFill>
-                <a:srgbClr val="7ED957"/>
+                <a:srgbClr val="3779E3"/>
               </a:solidFill>
             </p:spPr>
           </p:sp>
@@ -10226,7 +10226,7 @@
                 </a:pathLst>
               </a:custGeom>
               <a:solidFill>
-                <a:srgbClr val="B4B4B4">
+                <a:srgbClr val="3779E3">
                   <a:alpha val="62745"/>
                 </a:srgbClr>
               </a:solidFill>
@@ -10459,7 +10459,7 @@
                 </a:pathLst>
               </a:custGeom>
               <a:solidFill>
-                <a:srgbClr val="B4B4B4"/>
+                <a:srgbClr val="3779E3"/>
               </a:solidFill>
             </p:spPr>
           </p:sp>
@@ -18332,7 +18332,7 @@
         </p:nvSpPr>
         <p:spPr>
           <a:xfrm flipH="false" flipV="false" rot="0">
-            <a:off x="1028700" y="3735503"/>
+            <a:off x="810360" y="3776124"/>
             <a:ext cx="16230600" cy="2734753"/>
           </a:xfrm>
           <a:custGeom>

--- a/slides/Soutenance_20min.pptx
+++ b/slides/Soutenance_20min.pptx
@@ -4166,7 +4166,157 @@
       </p:grpSp>
       <p:sp>
         <p:nvSpPr>
-          <p:cNvPr name="TextBox 9" id="9"/>
+          <p:cNvPr name="Freeform 9" id="9"/>
+          <p:cNvSpPr/>
+          <p:nvPr/>
+        </p:nvSpPr>
+        <p:spPr>
+          <a:xfrm flipH="false" flipV="false" rot="0">
+            <a:off x="17096832" y="8995922"/>
+            <a:ext cx="324936" cy="443095"/>
+          </a:xfrm>
+          <a:custGeom>
+            <a:avLst/>
+            <a:gdLst/>
+            <a:ahLst/>
+            <a:cxnLst/>
+            <a:rect r="r" b="b" t="t" l="l"/>
+            <a:pathLst>
+              <a:path h="443095" w="324936">
+                <a:moveTo>
+                  <a:pt x="0" y="0"/>
+                </a:moveTo>
+                <a:lnTo>
+                  <a:pt x="324936" y="0"/>
+                </a:lnTo>
+                <a:lnTo>
+                  <a:pt x="324936" y="443096"/>
+                </a:lnTo>
+                <a:lnTo>
+                  <a:pt x="0" y="443096"/>
+                </a:lnTo>
+                <a:lnTo>
+                  <a:pt x="0" y="0"/>
+                </a:lnTo>
+                <a:close/>
+              </a:path>
+            </a:pathLst>
+          </a:custGeom>
+          <a:blipFill>
+            <a:blip r:embed="rId5">
+              <a:extLst>
+                <a:ext uri="{96DAC541-7B7A-43D3-8B79-37D633B846F1}">
+                  <asvg:svgBlip xmlns:asvg="http://schemas.microsoft.com/office/drawing/2016/SVG/main" r:embed="rId6"/>
+                </a:ext>
+              </a:extLst>
+            </a:blip>
+            <a:stretch>
+              <a:fillRect l="0" t="0" r="0" b="0"/>
+            </a:stretch>
+          </a:blipFill>
+        </p:spPr>
+      </p:sp>
+      <p:sp>
+        <p:nvSpPr>
+          <p:cNvPr name="Freeform 10" id="10"/>
+          <p:cNvSpPr/>
+          <p:nvPr/>
+        </p:nvSpPr>
+        <p:spPr>
+          <a:xfrm flipH="true" flipV="true" rot="0">
+            <a:off x="16822619" y="1028700"/>
+            <a:ext cx="436681" cy="339023"/>
+          </a:xfrm>
+          <a:custGeom>
+            <a:avLst/>
+            <a:gdLst/>
+            <a:ahLst/>
+            <a:cxnLst/>
+            <a:rect r="r" b="b" t="t" l="l"/>
+            <a:pathLst>
+              <a:path h="339023" w="436681">
+                <a:moveTo>
+                  <a:pt x="436681" y="339023"/>
+                </a:moveTo>
+                <a:lnTo>
+                  <a:pt x="0" y="339023"/>
+                </a:lnTo>
+                <a:lnTo>
+                  <a:pt x="0" y="0"/>
+                </a:lnTo>
+                <a:lnTo>
+                  <a:pt x="436681" y="0"/>
+                </a:lnTo>
+                <a:lnTo>
+                  <a:pt x="436681" y="339023"/>
+                </a:lnTo>
+                <a:close/>
+              </a:path>
+            </a:pathLst>
+          </a:custGeom>
+          <a:blipFill>
+            <a:blip r:embed="rId7">
+              <a:extLst>
+                <a:ext uri="{96DAC541-7B7A-43D3-8B79-37D633B846F1}">
+                  <asvg:svgBlip xmlns:asvg="http://schemas.microsoft.com/office/drawing/2016/SVG/main" r:embed="rId8"/>
+                </a:ext>
+              </a:extLst>
+            </a:blip>
+            <a:stretch>
+              <a:fillRect l="0" t="0" r="0" b="0"/>
+            </a:stretch>
+          </a:blipFill>
+        </p:spPr>
+      </p:sp>
+      <p:sp>
+        <p:nvSpPr>
+          <p:cNvPr name="Freeform 11" id="11"/>
+          <p:cNvSpPr/>
+          <p:nvPr/>
+        </p:nvSpPr>
+        <p:spPr>
+          <a:xfrm flipH="false" flipV="false" rot="0">
+            <a:off x="1028700" y="3436011"/>
+            <a:ext cx="7154448" cy="3980356"/>
+          </a:xfrm>
+          <a:custGeom>
+            <a:avLst/>
+            <a:gdLst/>
+            <a:ahLst/>
+            <a:cxnLst/>
+            <a:rect r="r" b="b" t="t" l="l"/>
+            <a:pathLst>
+              <a:path h="3980356" w="7154448">
+                <a:moveTo>
+                  <a:pt x="0" y="0"/>
+                </a:moveTo>
+                <a:lnTo>
+                  <a:pt x="7154448" y="0"/>
+                </a:lnTo>
+                <a:lnTo>
+                  <a:pt x="7154448" y="3980357"/>
+                </a:lnTo>
+                <a:lnTo>
+                  <a:pt x="0" y="3980357"/>
+                </a:lnTo>
+                <a:lnTo>
+                  <a:pt x="0" y="0"/>
+                </a:lnTo>
+                <a:close/>
+              </a:path>
+            </a:pathLst>
+          </a:custGeom>
+          <a:blipFill>
+            <a:blip r:embed="rId9"/>
+            <a:stretch>
+              <a:fillRect l="0" t="0" r="-242" b="0"/>
+            </a:stretch>
+          </a:blipFill>
+        </p:spPr>
+      </p:sp>
+      <p:sp>
+        <p:nvSpPr>
+          <p:cNvPr name="TextBox 12" id="12"/>
           <p:cNvSpPr txBox="true"/>
           <p:nvPr/>
         </p:nvSpPr>
@@ -4207,13 +4357,13 @@
       </p:sp>
       <p:sp>
         <p:nvSpPr>
-          <p:cNvPr name="TextBox 10" id="10"/>
+          <p:cNvPr name="TextBox 13" id="13"/>
           <p:cNvSpPr txBox="true"/>
           <p:nvPr/>
         </p:nvSpPr>
         <p:spPr>
           <a:xfrm rot="0">
-            <a:off x="11953456" y="2329801"/>
+            <a:off x="11972045" y="2329801"/>
             <a:ext cx="5449724" cy="5924550"/>
           </a:xfrm>
           <a:prstGeom prst="rect">
@@ -4546,156 +4696,6 @@
             </a:r>
           </a:p>
         </p:txBody>
-      </p:sp>
-      <p:sp>
-        <p:nvSpPr>
-          <p:cNvPr name="Freeform 11" id="11"/>
-          <p:cNvSpPr/>
-          <p:nvPr/>
-        </p:nvSpPr>
-        <p:spPr>
-          <a:xfrm flipH="false" flipV="false" rot="0">
-            <a:off x="700280" y="3088924"/>
-            <a:ext cx="7144316" cy="4604452"/>
-          </a:xfrm>
-          <a:custGeom>
-            <a:avLst/>
-            <a:gdLst/>
-            <a:ahLst/>
-            <a:cxnLst/>
-            <a:rect r="r" b="b" t="t" l="l"/>
-            <a:pathLst>
-              <a:path h="4604452" w="7144316">
-                <a:moveTo>
-                  <a:pt x="0" y="0"/>
-                </a:moveTo>
-                <a:lnTo>
-                  <a:pt x="7144316" y="0"/>
-                </a:lnTo>
-                <a:lnTo>
-                  <a:pt x="7144316" y="4604452"/>
-                </a:lnTo>
-                <a:lnTo>
-                  <a:pt x="0" y="4604452"/>
-                </a:lnTo>
-                <a:lnTo>
-                  <a:pt x="0" y="0"/>
-                </a:lnTo>
-                <a:close/>
-              </a:path>
-            </a:pathLst>
-          </a:custGeom>
-          <a:blipFill>
-            <a:blip r:embed="rId5"/>
-            <a:stretch>
-              <a:fillRect l="-349" t="-14471" r="0" b="-6003"/>
-            </a:stretch>
-          </a:blipFill>
-        </p:spPr>
-      </p:sp>
-      <p:sp>
-        <p:nvSpPr>
-          <p:cNvPr name="Freeform 12" id="12"/>
-          <p:cNvSpPr/>
-          <p:nvPr/>
-        </p:nvSpPr>
-        <p:spPr>
-          <a:xfrm flipH="false" flipV="false" rot="0">
-            <a:off x="17096832" y="8995922"/>
-            <a:ext cx="324936" cy="443095"/>
-          </a:xfrm>
-          <a:custGeom>
-            <a:avLst/>
-            <a:gdLst/>
-            <a:ahLst/>
-            <a:cxnLst/>
-            <a:rect r="r" b="b" t="t" l="l"/>
-            <a:pathLst>
-              <a:path h="443095" w="324936">
-                <a:moveTo>
-                  <a:pt x="0" y="0"/>
-                </a:moveTo>
-                <a:lnTo>
-                  <a:pt x="324936" y="0"/>
-                </a:lnTo>
-                <a:lnTo>
-                  <a:pt x="324936" y="443096"/>
-                </a:lnTo>
-                <a:lnTo>
-                  <a:pt x="0" y="443096"/>
-                </a:lnTo>
-                <a:lnTo>
-                  <a:pt x="0" y="0"/>
-                </a:lnTo>
-                <a:close/>
-              </a:path>
-            </a:pathLst>
-          </a:custGeom>
-          <a:blipFill>
-            <a:blip r:embed="rId6">
-              <a:extLst>
-                <a:ext uri="{96DAC541-7B7A-43D3-8B79-37D633B846F1}">
-                  <asvg:svgBlip xmlns:asvg="http://schemas.microsoft.com/office/drawing/2016/SVG/main" r:embed="rId7"/>
-                </a:ext>
-              </a:extLst>
-            </a:blip>
-            <a:stretch>
-              <a:fillRect l="0" t="0" r="0" b="0"/>
-            </a:stretch>
-          </a:blipFill>
-        </p:spPr>
-      </p:sp>
-      <p:sp>
-        <p:nvSpPr>
-          <p:cNvPr name="Freeform 13" id="13"/>
-          <p:cNvSpPr/>
-          <p:nvPr/>
-        </p:nvSpPr>
-        <p:spPr>
-          <a:xfrm flipH="true" flipV="true" rot="0">
-            <a:off x="16822619" y="1028700"/>
-            <a:ext cx="436681" cy="339023"/>
-          </a:xfrm>
-          <a:custGeom>
-            <a:avLst/>
-            <a:gdLst/>
-            <a:ahLst/>
-            <a:cxnLst/>
-            <a:rect r="r" b="b" t="t" l="l"/>
-            <a:pathLst>
-              <a:path h="339023" w="436681">
-                <a:moveTo>
-                  <a:pt x="436681" y="339023"/>
-                </a:moveTo>
-                <a:lnTo>
-                  <a:pt x="0" y="339023"/>
-                </a:lnTo>
-                <a:lnTo>
-                  <a:pt x="0" y="0"/>
-                </a:lnTo>
-                <a:lnTo>
-                  <a:pt x="436681" y="0"/>
-                </a:lnTo>
-                <a:lnTo>
-                  <a:pt x="436681" y="339023"/>
-                </a:lnTo>
-                <a:close/>
-              </a:path>
-            </a:pathLst>
-          </a:custGeom>
-          <a:blipFill>
-            <a:blip r:embed="rId8">
-              <a:extLst>
-                <a:ext uri="{96DAC541-7B7A-43D3-8B79-37D633B846F1}">
-                  <asvg:svgBlip xmlns:asvg="http://schemas.microsoft.com/office/drawing/2016/SVG/main" r:embed="rId9"/>
-                </a:ext>
-              </a:extLst>
-            </a:blip>
-            <a:stretch>
-              <a:fillRect l="0" t="0" r="0" b="0"/>
-            </a:stretch>
-          </a:blipFill>
-        </p:spPr>
       </p:sp>
     </p:spTree>
   </p:cSld>
@@ -6554,7 +6554,7 @@
         </p:nvSpPr>
         <p:spPr>
           <a:xfrm flipH="false" flipV="false" rot="0">
-            <a:off x="1709698" y="2470116"/>
+            <a:off x="2578590" y="2294925"/>
             <a:ext cx="4837565" cy="1929379"/>
           </a:xfrm>
           <a:custGeom>
@@ -6572,10 +6572,10 @@
                   <a:pt x="4837566" y="0"/>
                 </a:lnTo>
                 <a:lnTo>
-                  <a:pt x="4837566" y="1929380"/>
+                  <a:pt x="4837566" y="1929379"/>
                 </a:lnTo>
                 <a:lnTo>
-                  <a:pt x="0" y="1929380"/>
+                  <a:pt x="0" y="1929379"/>
                 </a:lnTo>
                 <a:lnTo>
                   <a:pt x="0" y="0"/>
@@ -6708,7 +6708,7 @@
         </p:nvGrpSpPr>
         <p:grpSpPr>
           <a:xfrm rot="0">
-            <a:off x="1028700" y="1028700"/>
+            <a:off x="1028700" y="847982"/>
             <a:ext cx="4594145" cy="361435"/>
             <a:chOff x="0" y="0"/>
             <a:chExt cx="6125526" cy="481914"/>
@@ -6813,427 +6813,7 @@
       </p:grpSp>
       <p:sp>
         <p:nvSpPr>
-          <p:cNvPr name="TextBox 9" id="9"/>
-          <p:cNvSpPr txBox="true"/>
-          <p:nvPr/>
-        </p:nvSpPr>
-        <p:spPr>
-          <a:xfrm rot="0">
-            <a:off x="1209418" y="1939452"/>
-            <a:ext cx="5710914" cy="355473"/>
-          </a:xfrm>
-          <a:prstGeom prst="rect">
-            <a:avLst/>
-          </a:prstGeom>
-        </p:spPr>
-        <p:txBody>
-          <a:bodyPr anchor="t" rtlCol="false" tIns="0" lIns="0" bIns="0" rIns="0">
-            <a:spAutoFit/>
-          </a:bodyPr>
-          <a:lstStyle/>
-          <a:p>
-            <a:pPr algn="l">
-              <a:lnSpc>
-                <a:spcPts val="2435"/>
-              </a:lnSpc>
-            </a:pPr>
-            <a:r>
-              <a:rPr lang="en-US" sz="2799" spc="-137" b="true">
-                <a:solidFill>
-                  <a:srgbClr val="000000"/>
-                </a:solidFill>
-                <a:latin typeface="Arial Bold"/>
-                <a:ea typeface="Arial Bold"/>
-                <a:cs typeface="Arial Bold"/>
-                <a:sym typeface="Arial Bold"/>
-              </a:rPr>
-              <a:t>Taux de ré-achat &amp; Fidélisation client</a:t>
-            </a:r>
-          </a:p>
-        </p:txBody>
-      </p:sp>
-      <p:sp>
-        <p:nvSpPr>
-          <p:cNvPr name="TextBox 10" id="10"/>
-          <p:cNvSpPr txBox="true"/>
-          <p:nvPr/>
-        </p:nvSpPr>
-        <p:spPr>
-          <a:xfrm rot="0">
-            <a:off x="10178499" y="2750912"/>
-            <a:ext cx="5910830" cy="5105400"/>
-          </a:xfrm>
-          <a:prstGeom prst="rect">
-            <a:avLst/>
-          </a:prstGeom>
-        </p:spPr>
-        <p:txBody>
-          <a:bodyPr anchor="t" rtlCol="false" tIns="0" lIns="0" bIns="0" rIns="0">
-            <a:spAutoFit/>
-          </a:bodyPr>
-          <a:lstStyle/>
-          <a:p>
-            <a:pPr algn="just">
-              <a:lnSpc>
-                <a:spcPts val="2239"/>
-              </a:lnSpc>
-              <a:spcBef>
-                <a:spcPct val="0"/>
-              </a:spcBef>
-            </a:pPr>
-            <a:r>
-              <a:rPr lang="en-US" b="true" sz="1599" spc="-78" u="sng">
-                <a:solidFill>
-                  <a:srgbClr val="000000"/>
-                </a:solidFill>
-                <a:latin typeface="Arial Bold"/>
-                <a:ea typeface="Arial Bold"/>
-                <a:cs typeface="Arial Bold"/>
-                <a:sym typeface="Arial Bold"/>
-              </a:rPr>
-              <a:t>Principaux constats :</a:t>
-            </a:r>
-          </a:p>
-          <a:p>
-            <a:pPr algn="l" marL="302261" indent="-151130" lvl="1">
-              <a:lnSpc>
-                <a:spcPts val="1960"/>
-              </a:lnSpc>
-              <a:buFont typeface="Arial"/>
-              <a:buChar char="•"/>
-            </a:pPr>
-            <a:r>
-              <a:rPr lang="en-US" sz="1400" spc="-68">
-                <a:solidFill>
-                  <a:srgbClr val="000000"/>
-                </a:solidFill>
-                <a:latin typeface="Arial"/>
-                <a:ea typeface="Arial"/>
-                <a:cs typeface="Arial"/>
-                <a:sym typeface="Arial"/>
-              </a:rPr>
-              <a:t>Taux de ré-ach</a:t>
-            </a:r>
-            <a:r>
-              <a:rPr lang="en-US" sz="1400" spc="-68">
-                <a:solidFill>
-                  <a:srgbClr val="000000"/>
-                </a:solidFill>
-                <a:latin typeface="Arial"/>
-                <a:ea typeface="Arial"/>
-                <a:cs typeface="Arial"/>
-                <a:sym typeface="Arial"/>
-              </a:rPr>
-              <a:t>at 2023 : 0% (aucun client avec ≥2 commandes Complete en 2023)</a:t>
-            </a:r>
-          </a:p>
-          <a:p>
-            <a:pPr algn="l" marL="302261" indent="-151130" lvl="1">
-              <a:lnSpc>
-                <a:spcPts val="1960"/>
-              </a:lnSpc>
-              <a:buFont typeface="Arial"/>
-              <a:buChar char="•"/>
-            </a:pPr>
-            <a:r>
-              <a:rPr lang="en-US" sz="1400" spc="-68">
-                <a:solidFill>
-                  <a:srgbClr val="000000"/>
-                </a:solidFill>
-                <a:latin typeface="Arial"/>
-                <a:ea typeface="Arial"/>
-                <a:cs typeface="Arial"/>
-                <a:sym typeface="Arial"/>
-              </a:rPr>
-              <a:t>Taux de ré-achat 2024 : 3,39% (6 clients sur 177 ont commandé au moins 2 fois)</a:t>
-            </a:r>
-          </a:p>
-          <a:p>
-            <a:pPr algn="l" marL="302261" indent="-151130" lvl="1">
-              <a:lnSpc>
-                <a:spcPts val="1960"/>
-              </a:lnSpc>
-              <a:buFont typeface="Arial"/>
-              <a:buChar char="•"/>
-            </a:pPr>
-            <a:r>
-              <a:rPr lang="en-US" sz="1400" spc="-68">
-                <a:solidFill>
-                  <a:srgbClr val="000000"/>
-                </a:solidFill>
-                <a:latin typeface="Arial"/>
-                <a:ea typeface="Arial"/>
-                <a:cs typeface="Arial"/>
-                <a:sym typeface="Arial"/>
-              </a:rPr>
-              <a:t>La fidélisation démarre mais reste très faible — marge de progression énorme</a:t>
-            </a:r>
-          </a:p>
-          <a:p>
-            <a:pPr algn="l" marL="302261" indent="-151130" lvl="1">
-              <a:lnSpc>
-                <a:spcPts val="1960"/>
-              </a:lnSpc>
-              <a:buFont typeface="Arial"/>
-              <a:buChar char="•"/>
-            </a:pPr>
-            <a:r>
-              <a:rPr lang="en-US" sz="1400" spc="-68">
-                <a:solidFill>
-                  <a:srgbClr val="000000"/>
-                </a:solidFill>
-                <a:latin typeface="Arial"/>
-                <a:ea typeface="Arial"/>
-                <a:cs typeface="Arial"/>
-                <a:sym typeface="Arial"/>
-              </a:rPr>
-              <a:t>Panier moyen 2024 : 85,41 € — Outerwear tire le panier à ~225 € par article</a:t>
-            </a:r>
-          </a:p>
-          <a:p>
-            <a:pPr algn="l" marL="302261" indent="-151130" lvl="1">
-              <a:lnSpc>
-                <a:spcPts val="1960"/>
-              </a:lnSpc>
-              <a:buFont typeface="Arial"/>
-              <a:buChar char="•"/>
-            </a:pPr>
-            <a:r>
-              <a:rPr lang="en-US" sz="1400" spc="-68">
-                <a:solidFill>
-                  <a:srgbClr val="000000"/>
-                </a:solidFill>
-                <a:latin typeface="Arial"/>
-                <a:ea typeface="Arial"/>
-                <a:cs typeface="Arial"/>
-                <a:sym typeface="Arial"/>
-              </a:rPr>
-              <a:t>Commandes 2023 : 97 | Commandes 2024 : 184 (×1,9) — base clients en forte croissance</a:t>
-            </a:r>
-          </a:p>
-          <a:p>
-            <a:pPr algn="l">
-              <a:lnSpc>
-                <a:spcPts val="1960"/>
-              </a:lnSpc>
-            </a:pPr>
-          </a:p>
-          <a:p>
-            <a:pPr algn="l">
-              <a:lnSpc>
-                <a:spcPts val="2239"/>
-              </a:lnSpc>
-            </a:pPr>
-            <a:r>
-              <a:rPr lang="en-US" b="true" sz="1599" spc="-78" u="sng">
-                <a:solidFill>
-                  <a:srgbClr val="000000"/>
-                </a:solidFill>
-                <a:latin typeface="Arial Bold"/>
-                <a:ea typeface="Arial Bold"/>
-                <a:cs typeface="Arial Bold"/>
-                <a:sym typeface="Arial Bold"/>
-              </a:rPr>
-              <a:t>Insight clé:</a:t>
-            </a:r>
-          </a:p>
-          <a:p>
-            <a:pPr algn="l">
-              <a:lnSpc>
-                <a:spcPts val="2239"/>
-              </a:lnSpc>
-            </a:pPr>
-          </a:p>
-          <a:p>
-            <a:pPr algn="l" marL="302261" indent="-151130" lvl="1">
-              <a:lnSpc>
-                <a:spcPts val="1960"/>
-              </a:lnSpc>
-              <a:buFont typeface="Arial"/>
-              <a:buChar char="•"/>
-            </a:pPr>
-            <a:r>
-              <a:rPr lang="en-US" sz="1400" spc="-68">
-                <a:solidFill>
-                  <a:srgbClr val="000000"/>
-                </a:solidFill>
-                <a:latin typeface="Arial"/>
-                <a:ea typeface="Arial"/>
-                <a:cs typeface="Arial"/>
-                <a:sym typeface="Arial"/>
-              </a:rPr>
-              <a:t>La fidélisation décolle en 2024 (+3,4 pts) mais reste faible. C'est le chantier prioritaire : un client qui revient coûte 5× moins à acquérir qu'un nouveau.</a:t>
-            </a:r>
-          </a:p>
-          <a:p>
-            <a:pPr algn="just">
-              <a:lnSpc>
-                <a:spcPts val="1960"/>
-              </a:lnSpc>
-              <a:spcBef>
-                <a:spcPct val="0"/>
-              </a:spcBef>
-            </a:pPr>
-          </a:p>
-          <a:p>
-            <a:pPr algn="just">
-              <a:lnSpc>
-                <a:spcPts val="2239"/>
-              </a:lnSpc>
-              <a:spcBef>
-                <a:spcPct val="0"/>
-              </a:spcBef>
-            </a:pPr>
-            <a:r>
-              <a:rPr lang="en-US" b="true" sz="1599" spc="-78" u="sng">
-                <a:solidFill>
-                  <a:srgbClr val="000000"/>
-                </a:solidFill>
-                <a:latin typeface="Arial Bold"/>
-                <a:ea typeface="Arial Bold"/>
-                <a:cs typeface="Arial Bold"/>
-                <a:sym typeface="Arial Bold"/>
-              </a:rPr>
-              <a:t>Recomma</a:t>
-            </a:r>
-            <a:r>
-              <a:rPr lang="en-US" b="true" sz="1599" spc="-78" u="sng">
-                <a:solidFill>
-                  <a:srgbClr val="000000"/>
-                </a:solidFill>
-                <a:latin typeface="Arial Bold"/>
-                <a:ea typeface="Arial Bold"/>
-                <a:cs typeface="Arial Bold"/>
-                <a:sym typeface="Arial Bold"/>
-              </a:rPr>
-              <a:t>ndations :</a:t>
-            </a:r>
-          </a:p>
-          <a:p>
-            <a:pPr algn="just">
-              <a:lnSpc>
-                <a:spcPts val="2239"/>
-              </a:lnSpc>
-              <a:spcBef>
-                <a:spcPct val="0"/>
-              </a:spcBef>
-            </a:pPr>
-          </a:p>
-          <a:p>
-            <a:pPr algn="l" marL="302261" indent="-151130" lvl="1">
-              <a:lnSpc>
-                <a:spcPts val="1960"/>
-              </a:lnSpc>
-              <a:buFont typeface="Arial"/>
-              <a:buChar char="•"/>
-            </a:pPr>
-            <a:r>
-              <a:rPr lang="en-US" sz="1400" spc="-68">
-                <a:solidFill>
-                  <a:srgbClr val="000000"/>
-                </a:solidFill>
-                <a:latin typeface="Arial"/>
-                <a:ea typeface="Arial"/>
-                <a:cs typeface="Arial"/>
-                <a:sym typeface="Arial"/>
-              </a:rPr>
-              <a:t>D</a:t>
-            </a:r>
-            <a:r>
-              <a:rPr lang="en-US" sz="1400" spc="-68">
-                <a:solidFill>
-                  <a:srgbClr val="000000"/>
-                </a:solidFill>
-                <a:latin typeface="Arial"/>
-                <a:ea typeface="Arial"/>
-                <a:cs typeface="Arial"/>
-                <a:sym typeface="Arial"/>
-              </a:rPr>
-              <a:t>éployer programme CRM : email J+7 post-achat + offre personnalisée J+30.</a:t>
-            </a:r>
-          </a:p>
-          <a:p>
-            <a:pPr algn="l" marL="302261" indent="-151130" lvl="1">
-              <a:lnSpc>
-                <a:spcPts val="1960"/>
-              </a:lnSpc>
-              <a:buFont typeface="Arial"/>
-              <a:buChar char="•"/>
-            </a:pPr>
-            <a:r>
-              <a:rPr lang="en-US" sz="1400" spc="-68">
-                <a:solidFill>
-                  <a:srgbClr val="000000"/>
-                </a:solidFill>
-                <a:latin typeface="Arial"/>
-                <a:ea typeface="Arial"/>
-                <a:cs typeface="Arial"/>
-                <a:sym typeface="Arial"/>
-              </a:rPr>
-              <a:t>Objectif : 10% de taux ré-achat en 2025.</a:t>
-            </a:r>
-          </a:p>
-          <a:p>
-            <a:pPr algn="just">
-              <a:lnSpc>
-                <a:spcPts val="1960"/>
-              </a:lnSpc>
-              <a:spcBef>
-                <a:spcPct val="0"/>
-              </a:spcBef>
-            </a:pPr>
-          </a:p>
-        </p:txBody>
-      </p:sp>
-      <p:sp>
-        <p:nvSpPr>
-          <p:cNvPr name="Freeform 11" id="11"/>
-          <p:cNvSpPr/>
-          <p:nvPr/>
-        </p:nvSpPr>
-        <p:spPr>
-          <a:xfrm flipH="false" flipV="false" rot="0">
-            <a:off x="1209418" y="4129668"/>
-            <a:ext cx="7264245" cy="4349466"/>
-          </a:xfrm>
-          <a:custGeom>
-            <a:avLst/>
-            <a:gdLst/>
-            <a:ahLst/>
-            <a:cxnLst/>
-            <a:rect r="r" b="b" t="t" l="l"/>
-            <a:pathLst>
-              <a:path h="4349466" w="7264245">
-                <a:moveTo>
-                  <a:pt x="0" y="0"/>
-                </a:moveTo>
-                <a:lnTo>
-                  <a:pt x="7264244" y="0"/>
-                </a:lnTo>
-                <a:lnTo>
-                  <a:pt x="7264244" y="4349466"/>
-                </a:lnTo>
-                <a:lnTo>
-                  <a:pt x="0" y="4349466"/>
-                </a:lnTo>
-                <a:lnTo>
-                  <a:pt x="0" y="0"/>
-                </a:lnTo>
-                <a:close/>
-              </a:path>
-            </a:pathLst>
-          </a:custGeom>
-          <a:blipFill>
-            <a:blip r:embed="rId5"/>
-            <a:stretch>
-              <a:fillRect l="0" t="0" r="0" b="0"/>
-            </a:stretch>
-          </a:blipFill>
-        </p:spPr>
-      </p:sp>
-      <p:sp>
-        <p:nvSpPr>
-          <p:cNvPr name="Freeform 12" id="12"/>
+          <p:cNvPr name="Freeform 9" id="9"/>
           <p:cNvSpPr/>
           <p:nvPr/>
         </p:nvSpPr>
@@ -7270,10 +6850,10 @@
             </a:pathLst>
           </a:custGeom>
           <a:blipFill>
-            <a:blip r:embed="rId6">
+            <a:blip r:embed="rId5">
               <a:extLst>
                 <a:ext uri="{96DAC541-7B7A-43D3-8B79-37D633B846F1}">
-                  <asvg:svgBlip xmlns:asvg="http://schemas.microsoft.com/office/drawing/2016/SVG/main" r:embed="rId7"/>
+                  <asvg:svgBlip xmlns:asvg="http://schemas.microsoft.com/office/drawing/2016/SVG/main" r:embed="rId6"/>
                 </a:ext>
               </a:extLst>
             </a:blip>
@@ -7285,7 +6865,7 @@
       </p:sp>
       <p:sp>
         <p:nvSpPr>
-          <p:cNvPr name="Freeform 13" id="13"/>
+          <p:cNvPr name="Freeform 10" id="10"/>
           <p:cNvSpPr/>
           <p:nvPr/>
         </p:nvSpPr>
@@ -7322,10 +6902,10 @@
             </a:pathLst>
           </a:custGeom>
           <a:blipFill>
-            <a:blip r:embed="rId8">
+            <a:blip r:embed="rId7">
               <a:extLst>
                 <a:ext uri="{96DAC541-7B7A-43D3-8B79-37D633B846F1}">
-                  <asvg:svgBlip xmlns:asvg="http://schemas.microsoft.com/office/drawing/2016/SVG/main" r:embed="rId9"/>
+                  <asvg:svgBlip xmlns:asvg="http://schemas.microsoft.com/office/drawing/2016/SVG/main" r:embed="rId8"/>
                 </a:ext>
               </a:extLst>
             </a:blip>
@@ -7334,6 +6914,426 @@
             </a:stretch>
           </a:blipFill>
         </p:spPr>
+      </p:sp>
+      <p:sp>
+        <p:nvSpPr>
+          <p:cNvPr name="Freeform 11" id="11"/>
+          <p:cNvSpPr/>
+          <p:nvPr/>
+        </p:nvSpPr>
+        <p:spPr>
+          <a:xfrm flipH="false" flipV="false" rot="0">
+            <a:off x="1209418" y="3927590"/>
+            <a:ext cx="8276849" cy="4671408"/>
+          </a:xfrm>
+          <a:custGeom>
+            <a:avLst/>
+            <a:gdLst/>
+            <a:ahLst/>
+            <a:cxnLst/>
+            <a:rect r="r" b="b" t="t" l="l"/>
+            <a:pathLst>
+              <a:path h="4671408" w="8276849">
+                <a:moveTo>
+                  <a:pt x="0" y="0"/>
+                </a:moveTo>
+                <a:lnTo>
+                  <a:pt x="8276848" y="0"/>
+                </a:lnTo>
+                <a:lnTo>
+                  <a:pt x="8276848" y="4671408"/>
+                </a:lnTo>
+                <a:lnTo>
+                  <a:pt x="0" y="4671408"/>
+                </a:lnTo>
+                <a:lnTo>
+                  <a:pt x="0" y="0"/>
+                </a:lnTo>
+                <a:close/>
+              </a:path>
+            </a:pathLst>
+          </a:custGeom>
+          <a:blipFill>
+            <a:blip r:embed="rId9"/>
+            <a:stretch>
+              <a:fillRect l="0" t="0" r="-1236" b="0"/>
+            </a:stretch>
+          </a:blipFill>
+        </p:spPr>
+      </p:sp>
+      <p:sp>
+        <p:nvSpPr>
+          <p:cNvPr name="TextBox 12" id="12"/>
+          <p:cNvSpPr txBox="true"/>
+          <p:nvPr/>
+        </p:nvSpPr>
+        <p:spPr>
+          <a:xfrm rot="0">
+            <a:off x="1209418" y="1939452"/>
+            <a:ext cx="5710914" cy="355473"/>
+          </a:xfrm>
+          <a:prstGeom prst="rect">
+            <a:avLst/>
+          </a:prstGeom>
+        </p:spPr>
+        <p:txBody>
+          <a:bodyPr anchor="t" rtlCol="false" tIns="0" lIns="0" bIns="0" rIns="0">
+            <a:spAutoFit/>
+          </a:bodyPr>
+          <a:lstStyle/>
+          <a:p>
+            <a:pPr algn="l">
+              <a:lnSpc>
+                <a:spcPts val="2435"/>
+              </a:lnSpc>
+            </a:pPr>
+            <a:r>
+              <a:rPr lang="en-US" sz="2799" spc="-137" b="true">
+                <a:solidFill>
+                  <a:srgbClr val="000000"/>
+                </a:solidFill>
+                <a:latin typeface="Arial Bold"/>
+                <a:ea typeface="Arial Bold"/>
+                <a:cs typeface="Arial Bold"/>
+                <a:sym typeface="Arial Bold"/>
+              </a:rPr>
+              <a:t>Taux de ré-achat &amp; Fidélisation client</a:t>
+            </a:r>
+          </a:p>
+        </p:txBody>
+      </p:sp>
+      <p:sp>
+        <p:nvSpPr>
+          <p:cNvPr name="TextBox 13" id="13"/>
+          <p:cNvSpPr txBox="true"/>
+          <p:nvPr/>
+        </p:nvSpPr>
+        <p:spPr>
+          <a:xfrm rot="0">
+            <a:off x="10666082" y="3040926"/>
+            <a:ext cx="5910830" cy="5105400"/>
+          </a:xfrm>
+          <a:prstGeom prst="rect">
+            <a:avLst/>
+          </a:prstGeom>
+        </p:spPr>
+        <p:txBody>
+          <a:bodyPr anchor="t" rtlCol="false" tIns="0" lIns="0" bIns="0" rIns="0">
+            <a:spAutoFit/>
+          </a:bodyPr>
+          <a:lstStyle/>
+          <a:p>
+            <a:pPr algn="just">
+              <a:lnSpc>
+                <a:spcPts val="2239"/>
+              </a:lnSpc>
+              <a:spcBef>
+                <a:spcPct val="0"/>
+              </a:spcBef>
+            </a:pPr>
+            <a:r>
+              <a:rPr lang="en-US" b="true" sz="1599" spc="-78" u="sng">
+                <a:solidFill>
+                  <a:srgbClr val="000000"/>
+                </a:solidFill>
+                <a:latin typeface="Arial Bold"/>
+                <a:ea typeface="Arial Bold"/>
+                <a:cs typeface="Arial Bold"/>
+                <a:sym typeface="Arial Bold"/>
+              </a:rPr>
+              <a:t>Principaux constats :</a:t>
+            </a:r>
+          </a:p>
+          <a:p>
+            <a:pPr algn="l" marL="302261" indent="-151130" lvl="1">
+              <a:lnSpc>
+                <a:spcPts val="1960"/>
+              </a:lnSpc>
+              <a:buFont typeface="Arial"/>
+              <a:buChar char="•"/>
+            </a:pPr>
+            <a:r>
+              <a:rPr lang="en-US" sz="1400" spc="-68">
+                <a:solidFill>
+                  <a:srgbClr val="000000"/>
+                </a:solidFill>
+                <a:latin typeface="Arial"/>
+                <a:ea typeface="Arial"/>
+                <a:cs typeface="Arial"/>
+                <a:sym typeface="Arial"/>
+              </a:rPr>
+              <a:t>Taux de ré-ach</a:t>
+            </a:r>
+            <a:r>
+              <a:rPr lang="en-US" sz="1400" spc="-68">
+                <a:solidFill>
+                  <a:srgbClr val="000000"/>
+                </a:solidFill>
+                <a:latin typeface="Arial"/>
+                <a:ea typeface="Arial"/>
+                <a:cs typeface="Arial"/>
+                <a:sym typeface="Arial"/>
+              </a:rPr>
+              <a:t>at 2023 : 0% (aucun client avec ≥2 commandes Complete en 2023)</a:t>
+            </a:r>
+          </a:p>
+          <a:p>
+            <a:pPr algn="l" marL="302261" indent="-151130" lvl="1">
+              <a:lnSpc>
+                <a:spcPts val="1960"/>
+              </a:lnSpc>
+              <a:buFont typeface="Arial"/>
+              <a:buChar char="•"/>
+            </a:pPr>
+            <a:r>
+              <a:rPr lang="en-US" sz="1400" spc="-68">
+                <a:solidFill>
+                  <a:srgbClr val="000000"/>
+                </a:solidFill>
+                <a:latin typeface="Arial"/>
+                <a:ea typeface="Arial"/>
+                <a:cs typeface="Arial"/>
+                <a:sym typeface="Arial"/>
+              </a:rPr>
+              <a:t>Taux de ré-achat 2024 : 3,39% (6 clients sur 177 ont commandé au moins 2 fois)</a:t>
+            </a:r>
+          </a:p>
+          <a:p>
+            <a:pPr algn="l" marL="302261" indent="-151130" lvl="1">
+              <a:lnSpc>
+                <a:spcPts val="1960"/>
+              </a:lnSpc>
+              <a:buFont typeface="Arial"/>
+              <a:buChar char="•"/>
+            </a:pPr>
+            <a:r>
+              <a:rPr lang="en-US" sz="1400" spc="-68">
+                <a:solidFill>
+                  <a:srgbClr val="000000"/>
+                </a:solidFill>
+                <a:latin typeface="Arial"/>
+                <a:ea typeface="Arial"/>
+                <a:cs typeface="Arial"/>
+                <a:sym typeface="Arial"/>
+              </a:rPr>
+              <a:t>La fidélisation démarre mais reste très faible — marge de progression énorme</a:t>
+            </a:r>
+          </a:p>
+          <a:p>
+            <a:pPr algn="l" marL="302261" indent="-151130" lvl="1">
+              <a:lnSpc>
+                <a:spcPts val="1960"/>
+              </a:lnSpc>
+              <a:buFont typeface="Arial"/>
+              <a:buChar char="•"/>
+            </a:pPr>
+            <a:r>
+              <a:rPr lang="en-US" sz="1400" spc="-68">
+                <a:solidFill>
+                  <a:srgbClr val="000000"/>
+                </a:solidFill>
+                <a:latin typeface="Arial"/>
+                <a:ea typeface="Arial"/>
+                <a:cs typeface="Arial"/>
+                <a:sym typeface="Arial"/>
+              </a:rPr>
+              <a:t>Panier moyen 2024 : 85,41 € — Outerwear tire le panier à ~225 € par article</a:t>
+            </a:r>
+          </a:p>
+          <a:p>
+            <a:pPr algn="l" marL="302261" indent="-151130" lvl="1">
+              <a:lnSpc>
+                <a:spcPts val="1960"/>
+              </a:lnSpc>
+              <a:buFont typeface="Arial"/>
+              <a:buChar char="•"/>
+            </a:pPr>
+            <a:r>
+              <a:rPr lang="en-US" sz="1400" spc="-68">
+                <a:solidFill>
+                  <a:srgbClr val="000000"/>
+                </a:solidFill>
+                <a:latin typeface="Arial"/>
+                <a:ea typeface="Arial"/>
+                <a:cs typeface="Arial"/>
+                <a:sym typeface="Arial"/>
+              </a:rPr>
+              <a:t>Commandes 2023 : 97 | Commandes 2024 : 184 (×1,9) — base clients en forte croissance</a:t>
+            </a:r>
+          </a:p>
+          <a:p>
+            <a:pPr algn="l">
+              <a:lnSpc>
+                <a:spcPts val="1960"/>
+              </a:lnSpc>
+            </a:pPr>
+          </a:p>
+          <a:p>
+            <a:pPr algn="l">
+              <a:lnSpc>
+                <a:spcPts val="2239"/>
+              </a:lnSpc>
+            </a:pPr>
+            <a:r>
+              <a:rPr lang="en-US" b="true" sz="1599" spc="-78" u="sng">
+                <a:solidFill>
+                  <a:srgbClr val="000000"/>
+                </a:solidFill>
+                <a:latin typeface="Arial Bold"/>
+                <a:ea typeface="Arial Bold"/>
+                <a:cs typeface="Arial Bold"/>
+                <a:sym typeface="Arial Bold"/>
+              </a:rPr>
+              <a:t>Insight clé:</a:t>
+            </a:r>
+          </a:p>
+          <a:p>
+            <a:pPr algn="l">
+              <a:lnSpc>
+                <a:spcPts val="2239"/>
+              </a:lnSpc>
+            </a:pPr>
+          </a:p>
+          <a:p>
+            <a:pPr algn="l" marL="302261" indent="-151130" lvl="1">
+              <a:lnSpc>
+                <a:spcPts val="1960"/>
+              </a:lnSpc>
+              <a:buFont typeface="Arial"/>
+              <a:buChar char="•"/>
+            </a:pPr>
+            <a:r>
+              <a:rPr lang="en-US" sz="1400" spc="-68">
+                <a:solidFill>
+                  <a:srgbClr val="000000"/>
+                </a:solidFill>
+                <a:latin typeface="Arial"/>
+                <a:ea typeface="Arial"/>
+                <a:cs typeface="Arial"/>
+                <a:sym typeface="Arial"/>
+              </a:rPr>
+              <a:t>La fidélisation décolle en 2024 (+3,4 pts) mais reste faible. C'est le chantier prioritaire : un client qui revient coûte 5× moins à acquérir qu'un nouveau.</a:t>
+            </a:r>
+          </a:p>
+          <a:p>
+            <a:pPr algn="just">
+              <a:lnSpc>
+                <a:spcPts val="1960"/>
+              </a:lnSpc>
+              <a:spcBef>
+                <a:spcPct val="0"/>
+              </a:spcBef>
+            </a:pPr>
+          </a:p>
+          <a:p>
+            <a:pPr algn="just">
+              <a:lnSpc>
+                <a:spcPts val="2239"/>
+              </a:lnSpc>
+              <a:spcBef>
+                <a:spcPct val="0"/>
+              </a:spcBef>
+            </a:pPr>
+            <a:r>
+              <a:rPr lang="en-US" b="true" sz="1599" spc="-78" u="sng">
+                <a:solidFill>
+                  <a:srgbClr val="000000"/>
+                </a:solidFill>
+                <a:latin typeface="Arial Bold"/>
+                <a:ea typeface="Arial Bold"/>
+                <a:cs typeface="Arial Bold"/>
+                <a:sym typeface="Arial Bold"/>
+              </a:rPr>
+              <a:t>Recomma</a:t>
+            </a:r>
+            <a:r>
+              <a:rPr lang="en-US" b="true" sz="1599" spc="-78" u="sng">
+                <a:solidFill>
+                  <a:srgbClr val="000000"/>
+                </a:solidFill>
+                <a:latin typeface="Arial Bold"/>
+                <a:ea typeface="Arial Bold"/>
+                <a:cs typeface="Arial Bold"/>
+                <a:sym typeface="Arial Bold"/>
+              </a:rPr>
+              <a:t>ndations :</a:t>
+            </a:r>
+          </a:p>
+          <a:p>
+            <a:pPr algn="just">
+              <a:lnSpc>
+                <a:spcPts val="2239"/>
+              </a:lnSpc>
+              <a:spcBef>
+                <a:spcPct val="0"/>
+              </a:spcBef>
+            </a:pPr>
+          </a:p>
+          <a:p>
+            <a:pPr algn="l" marL="302261" indent="-151130" lvl="1">
+              <a:lnSpc>
+                <a:spcPts val="1960"/>
+              </a:lnSpc>
+              <a:buFont typeface="Arial"/>
+              <a:buChar char="•"/>
+            </a:pPr>
+            <a:r>
+              <a:rPr lang="en-US" sz="1400" spc="-68">
+                <a:solidFill>
+                  <a:srgbClr val="000000"/>
+                </a:solidFill>
+                <a:latin typeface="Arial"/>
+                <a:ea typeface="Arial"/>
+                <a:cs typeface="Arial"/>
+                <a:sym typeface="Arial"/>
+              </a:rPr>
+              <a:t>D</a:t>
+            </a:r>
+            <a:r>
+              <a:rPr lang="en-US" sz="1400" spc="-68">
+                <a:solidFill>
+                  <a:srgbClr val="000000"/>
+                </a:solidFill>
+                <a:latin typeface="Arial"/>
+                <a:ea typeface="Arial"/>
+                <a:cs typeface="Arial"/>
+                <a:sym typeface="Arial"/>
+              </a:rPr>
+              <a:t>éployer programme CRM : email J+7 post-achat + offre personnalisée J+30.</a:t>
+            </a:r>
+          </a:p>
+          <a:p>
+            <a:pPr algn="l" marL="302261" indent="-151130" lvl="1">
+              <a:lnSpc>
+                <a:spcPts val="1960"/>
+              </a:lnSpc>
+              <a:buFont typeface="Arial"/>
+              <a:buChar char="•"/>
+            </a:pPr>
+            <a:r>
+              <a:rPr lang="en-US" sz="1400" spc="-68">
+                <a:solidFill>
+                  <a:srgbClr val="000000"/>
+                </a:solidFill>
+                <a:latin typeface="Arial"/>
+                <a:ea typeface="Arial"/>
+                <a:cs typeface="Arial"/>
+                <a:sym typeface="Arial"/>
+              </a:rPr>
+              <a:t>Objectif : 10% de taux ré-achat en 2025.</a:t>
+            </a:r>
+          </a:p>
+          <a:p>
+            <a:pPr algn="just">
+              <a:lnSpc>
+                <a:spcPts val="1960"/>
+              </a:lnSpc>
+              <a:spcBef>
+                <a:spcPct val="0"/>
+              </a:spcBef>
+            </a:pPr>
+          </a:p>
+        </p:txBody>
       </p:sp>
     </p:spTree>
   </p:cSld>

--- a/slides/Soutenance_20min.pptx
+++ b/slides/Soutenance_20min.pptx
@@ -3907,8 +3907,8 @@
         </p:nvSpPr>
         <p:spPr>
           <a:xfrm flipH="false" flipV="false" rot="0">
-            <a:off x="8263905" y="2377426"/>
-            <a:ext cx="4159085" cy="6027448"/>
+            <a:off x="8383826" y="2551840"/>
+            <a:ext cx="3482078" cy="5183319"/>
           </a:xfrm>
           <a:custGeom>
             <a:avLst/>
@@ -3917,18 +3917,18 @@
             <a:cxnLst/>
             <a:rect r="r" b="b" t="t" l="l"/>
             <a:pathLst>
-              <a:path h="6027448" w="4159085">
+              <a:path h="5183319" w="3482078">
                 <a:moveTo>
                   <a:pt x="0" y="0"/>
                 </a:moveTo>
                 <a:lnTo>
-                  <a:pt x="4159084" y="0"/>
+                  <a:pt x="3482078" y="0"/>
                 </a:lnTo>
                 <a:lnTo>
-                  <a:pt x="4159084" y="6027448"/>
+                  <a:pt x="3482078" y="5183320"/>
                 </a:lnTo>
                 <a:lnTo>
-                  <a:pt x="0" y="6027448"/>
+                  <a:pt x="0" y="5183320"/>
                 </a:lnTo>
                 <a:lnTo>
                   <a:pt x="0" y="0"/>
@@ -3940,7 +3940,7 @@
           <a:blipFill>
             <a:blip r:embed="rId2"/>
             <a:stretch>
-              <a:fillRect l="0" t="0" r="0" b="-1132"/>
+              <a:fillRect l="-2714" t="0" r="0" b="-1132"/>
             </a:stretch>
           </a:blipFill>
         </p:spPr>
@@ -4277,7 +4277,7 @@
         <p:spPr>
           <a:xfrm flipH="false" flipV="false" rot="0">
             <a:off x="1028700" y="3436011"/>
-            <a:ext cx="7154448" cy="3980356"/>
+            <a:ext cx="7250351" cy="3980356"/>
           </a:xfrm>
           <a:custGeom>
             <a:avLst/>
@@ -4286,15 +4286,15 @@
             <a:cxnLst/>
             <a:rect r="r" b="b" t="t" l="l"/>
             <a:pathLst>
-              <a:path h="3980356" w="7154448">
+              <a:path h="3980356" w="7250351">
                 <a:moveTo>
                   <a:pt x="0" y="0"/>
                 </a:moveTo>
                 <a:lnTo>
-                  <a:pt x="7154448" y="0"/>
+                  <a:pt x="7250351" y="0"/>
                 </a:lnTo>
                 <a:lnTo>
-                  <a:pt x="7154448" y="3980357"/>
+                  <a:pt x="7250351" y="3980357"/>
                 </a:lnTo>
                 <a:lnTo>
                   <a:pt x="0" y="3980357"/>
@@ -4309,7 +4309,7 @@
           <a:blipFill>
             <a:blip r:embed="rId9"/>
             <a:stretch>
-              <a:fillRect l="0" t="0" r="-242" b="0"/>
+              <a:fillRect l="0" t="-547" r="0" b="-547"/>
             </a:stretch>
           </a:blipFill>
         </p:spPr>
@@ -4363,7 +4363,7 @@
         </p:nvSpPr>
         <p:spPr>
           <a:xfrm rot="0">
-            <a:off x="11972045" y="2329801"/>
+            <a:off x="11972045" y="2195735"/>
             <a:ext cx="5449724" cy="5924550"/>
           </a:xfrm>
           <a:prstGeom prst="rect">
